--- a/PostOp Pal FINAL presentation.pptx
+++ b/PostOp Pal FINAL presentation.pptx
@@ -11,8 +11,8 @@
     <p:sldId id="334" r:id="rId5"/>
     <p:sldId id="319" r:id="rId6"/>
     <p:sldId id="320" r:id="rId7"/>
-    <p:sldId id="336" r:id="rId8"/>
-    <p:sldId id="323" r:id="rId9"/>
+    <p:sldId id="323" r:id="rId8"/>
+    <p:sldId id="336" r:id="rId9"/>
     <p:sldId id="335" r:id="rId10"/>
   </p:sldIdLst>
   <p:sldSz cx="12192000" cy="6858000"/>
@@ -214,7 +214,7 @@
           <a:p>
             <a:fld id="{AF8710A2-1535-B147-B3BB-C1589046255C}" type="datetimeFigureOut">
               <a:rPr lang="en-US" smtClean="0"/>
-              <a:t>4/26/2026</a:t>
+              <a:t>5/2/2026</a:t>
             </a:fld>
             <a:endParaRPr lang="en-US" dirty="0"/>
           </a:p>
@@ -527,65 +527,15 @@
           <a:p>
             <a:r>
               <a:rPr lang="en-US" dirty="0"/>
-              <a:t>Imagine you have just fallen, have extreme hip pain, and go to the local Emergency Dept</a:t>
-            </a:r>
-          </a:p>
-          <a:p>
+              <a:t>Good evening.  Welcome to the final presentation of my project – </a:t>
+            </a:r>
+            <a:r>
+              <a:rPr lang="en-US" dirty="0" err="1"/>
+              <a:t>PostOp</a:t>
+            </a:r>
             <a:r>
               <a:rPr lang="en-US" dirty="0"/>
-              <a:t>After you get some lovely pain meds, </a:t>
-            </a:r>
-            <a:r>
-              <a:rPr lang="en-US" dirty="0" err="1"/>
-              <a:t>Xrays</a:t>
-            </a:r>
-            <a:r>
-              <a:rPr lang="en-US" dirty="0"/>
-              <a:t>, </a:t>
-            </a:r>
-            <a:r>
-              <a:rPr lang="en-US" dirty="0" err="1"/>
-              <a:t>etc</a:t>
-            </a:r>
-            <a:r>
-              <a:rPr lang="en-US" dirty="0"/>
-              <a:t>, the orthopedic surgeon says he must operate to fix your broken hip</a:t>
-            </a:r>
-          </a:p>
-          <a:p>
-            <a:r>
-              <a:rPr lang="en-US" dirty="0"/>
-              <a:t>You end up with a total hip replacement and are admitted for a few days where people come in and out of your room constantly giving you instructions and medication.</a:t>
-            </a:r>
-          </a:p>
-          <a:p>
-            <a:r>
-              <a:rPr lang="en-US" dirty="0"/>
-              <a:t>Physical therapists get you up, and teach you how to walk with a walker, which you’ve never used.</a:t>
-            </a:r>
-          </a:p>
-          <a:p>
-            <a:r>
-              <a:rPr lang="en-US" dirty="0"/>
-              <a:t>The occupational therapists teach you how to put on your shoes and socks with equipment you’ve never seen.</a:t>
-            </a:r>
-          </a:p>
-          <a:p>
-            <a:r>
-              <a:rPr lang="en-US" dirty="0"/>
-              <a:t>Since it’s difficult and painful, and you can’t walk more than a few feet at a time, they are recommending subacute rehab.</a:t>
-            </a:r>
-          </a:p>
-          <a:p>
-            <a:r>
-              <a:rPr lang="en-US" dirty="0"/>
-              <a:t>This will allow you to continue to recover with regular therapy and nursing attention.</a:t>
-            </a:r>
-          </a:p>
-          <a:p>
-            <a:r>
-              <a:rPr lang="en-US" dirty="0"/>
-              <a:t>They can progress your program so that you can get home safely and with less pain.</a:t>
+              <a:t> Pal.  </a:t>
             </a:r>
           </a:p>
         </p:txBody>
@@ -672,79 +622,37 @@
           <a:p>
             <a:r>
               <a:rPr lang="en-US" dirty="0"/>
-              <a:t>But you don’t have insurance, or your insurance doesn’t cover rehab.  </a:t>
+              <a:t>For patients who come to the hospital with no insurance or have limited benefits from insurance.</a:t>
             </a:r>
           </a:p>
           <a:p>
             <a:r>
               <a:rPr lang="en-US" dirty="0"/>
-              <a:t>Or you were just in a rehab facility and have used up all of your rehab days and would have to pay hundreds of dollars to return, but you’re on a fixed income.  </a:t>
-            </a:r>
+              <a:t>There are over 25 million people in the US that fall into this category.  About 1.2 million in Georgia, which is 12% of the total population.  At least 1 in 10 patients coming into the hospitals fall into this category</a:t>
+            </a:r>
+          </a:p>
+          <a:p>
+            <a:endParaRPr lang="en-US" dirty="0"/>
           </a:p>
           <a:p>
             <a:r>
               <a:rPr lang="en-US" dirty="0"/>
-              <a:t>All of these scenarios happen daily at your local hospital.</a:t>
+              <a:t>Some do not have access or cannot afford to get to outpatient appointments to continue their rehab at home after leaving the hospital. </a:t>
             </a:r>
           </a:p>
           <a:p>
             <a:r>
               <a:rPr lang="en-US" dirty="0"/>
-              <a:t>Now you have to go home with a hip that was just fixed a few days ago.  You can’t walk far.  You have 12 stairs to get to your bedroom at home.</a:t>
-            </a:r>
+              <a:t>Without regular follow up, patients are at risk for complications and readmissions, all of which are costly.</a:t>
+            </a:r>
+          </a:p>
+          <a:p>
+            <a:endParaRPr lang="en-US" dirty="0"/>
           </a:p>
           <a:p>
             <a:r>
               <a:rPr lang="en-US" dirty="0"/>
-              <a:t>You’re given instruction on which meds to take, where to go for your next appt</a:t>
-            </a:r>
-          </a:p>
-          <a:p>
-            <a:r>
-              <a:rPr lang="en-US" dirty="0"/>
-              <a:t>The hospital has arranged non-emergent transport to your home.</a:t>
-            </a:r>
-          </a:p>
-          <a:p>
-            <a:r>
-              <a:rPr lang="en-US" dirty="0"/>
-              <a:t>You get home and try to remember everything you were told at the hospital</a:t>
-            </a:r>
-          </a:p>
-          <a:p>
-            <a:r>
-              <a:rPr lang="en-US" dirty="0"/>
-              <a:t>Your leg is hurting, but what are you supposed to do again?  You’ve been taking pain medication and can’t remember it all</a:t>
-            </a:r>
-          </a:p>
-          <a:p>
-            <a:r>
-              <a:rPr lang="en-US" dirty="0"/>
-              <a:t>How long am I supposed to use ice? Is it time for my next medication?  </a:t>
-            </a:r>
-          </a:p>
-          <a:p>
-            <a:r>
-              <a:rPr lang="en-US" dirty="0"/>
-              <a:t>I’m ready to go to bed but which leg goes up the steps first?  Can I shower?  </a:t>
-            </a:r>
-          </a:p>
-          <a:p>
-            <a:r>
-              <a:rPr lang="en-US" dirty="0"/>
-              <a:t>What were those exercises I’m supposed to do??</a:t>
-            </a:r>
-          </a:p>
-          <a:p>
-            <a:r>
-              <a:rPr lang="en-US" dirty="0"/>
-              <a:t>And the therapists kept telling me not to rotate my leg – was that in or out?</a:t>
-            </a:r>
-          </a:p>
-          <a:p>
-            <a:r>
-              <a:rPr lang="en-US" dirty="0"/>
-              <a:t>Your spouse has to get back to work tomorrow, so you will be alone to remember everything.  You have a stack of papers and instructions… where do you start?</a:t>
+              <a:t>The are often faced with overwhelming amounts of information to navigate their post-operative recovery.  They have handouts with a few pictures and lots of instructions, but no further information to aide in recovery. </a:t>
             </a:r>
           </a:p>
           <a:p>
@@ -833,68 +741,39 @@
           <a:lstStyle/>
           <a:p>
             <a:r>
-              <a:rPr lang="en-US" dirty="0"/>
-              <a:t>Then you remember that your physical therapist gave you a program that you can use to help you and your caregiver – </a:t>
-            </a:r>
-            <a:r>
               <a:rPr lang="en-US" dirty="0" err="1"/>
               <a:t>PostOp</a:t>
             </a:r>
             <a:r>
               <a:rPr lang="en-US" dirty="0"/>
-              <a:t> Pal</a:t>
-            </a:r>
+              <a:t> Pal provides a digital bridge using easily accessible software that has little to no cost.</a:t>
+            </a:r>
+          </a:p>
+          <a:p>
+            <a:endParaRPr lang="en-US" dirty="0"/>
           </a:p>
           <a:p>
             <a:r>
               <a:rPr lang="en-US" dirty="0"/>
-              <a:t>It’s one simple, easy, customized solution</a:t>
-            </a:r>
+              <a:t>There is dynamic guidance of a home program.  It’s individualized based on .the type of surgery and the phase of recovery, which is automatically calculated.  The program also provides randomly selected fall risk reduction reminders and performs a quick safety check to ensure you are ready to begin the post-op program.</a:t>
+            </a:r>
+          </a:p>
+          <a:p>
+            <a:endParaRPr lang="en-US" dirty="0"/>
           </a:p>
           <a:p>
             <a:r>
               <a:rPr lang="en-US" dirty="0"/>
-              <a:t>A program that will guide you through your post-operative phases of rehab</a:t>
-            </a:r>
-          </a:p>
-          <a:p>
+              <a:t>For total hip replacement patients, </a:t>
+            </a:r>
+            <a:r>
+              <a:rPr lang="en-US" dirty="0" err="1"/>
+              <a:t>PostOp</a:t>
+            </a:r>
             <a:r>
               <a:rPr lang="en-US" dirty="0"/>
-              <a:t>An individualized home program specific to your surgery that can progress your exercises.</a:t>
-            </a:r>
-          </a:p>
-          <a:p>
-            <a:r>
-              <a:rPr lang="en-US" dirty="0"/>
-              <a:t>Post-op care instructions for pain management like positioning ideas or modalities</a:t>
-            </a:r>
-          </a:p>
-          <a:p>
-            <a:r>
-              <a:rPr lang="en-US" dirty="0"/>
-              <a:t>The do’s and don’ts on which way you cannot move your leg after surgery</a:t>
-            </a:r>
-          </a:p>
-          <a:p>
-            <a:r>
-              <a:rPr lang="en-US" dirty="0"/>
-              <a:t>Reminder prompts to complete your exercise program, change position, and </a:t>
-            </a:r>
-          </a:p>
-          <a:p>
-            <a:r>
-              <a:rPr lang="en-US" dirty="0"/>
-              <a:t>Other helpful tips and tricks to maximize your recovery</a:t>
-            </a:r>
-          </a:p>
-          <a:p>
-            <a:r>
-              <a:rPr lang="en-US" dirty="0"/>
-              <a:t>All of this in one easy program.</a:t>
-            </a:r>
-          </a:p>
-          <a:p>
-            <a:endParaRPr lang="en-US" dirty="0"/>
+              <a:t> Pal also provides reminder of precautions based on which direction the hip was replaced. </a:t>
+            </a:r>
           </a:p>
         </p:txBody>
       </p:sp>
@@ -935,6 +814,129 @@
 </file>
 
 <file path=ppt/notesSlides/notesSlide4.xml><?xml version="1.0" encoding="utf-8"?>
+<p:notes xmlns:a="http://schemas.openxmlformats.org/drawingml/2006/main" xmlns:r="http://schemas.openxmlformats.org/officeDocument/2006/relationships" xmlns:p="http://schemas.openxmlformats.org/presentationml/2006/main">
+  <p:cSld>
+    <p:spTree>
+      <p:nvGrpSpPr>
+        <p:cNvPr id="1" name=""/>
+        <p:cNvGrpSpPr/>
+        <p:nvPr/>
+      </p:nvGrpSpPr>
+      <p:grpSpPr>
+        <a:xfrm>
+          <a:off x="0" y="0"/>
+          <a:ext cx="0" cy="0"/>
+          <a:chOff x="0" y="0"/>
+          <a:chExt cx="0" cy="0"/>
+        </a:xfrm>
+      </p:grpSpPr>
+      <p:sp>
+        <p:nvSpPr>
+          <p:cNvPr id="2" name="Slide Image Placeholder 1"/>
+          <p:cNvSpPr>
+            <a:spLocks noGrp="1" noRot="1" noChangeAspect="1"/>
+          </p:cNvSpPr>
+          <p:nvPr>
+            <p:ph type="sldImg"/>
+          </p:nvPr>
+        </p:nvSpPr>
+        <p:spPr/>
+      </p:sp>
+      <p:sp>
+        <p:nvSpPr>
+          <p:cNvPr id="3" name="Notes Placeholder 2"/>
+          <p:cNvSpPr>
+            <a:spLocks noGrp="1"/>
+          </p:cNvSpPr>
+          <p:nvPr>
+            <p:ph type="body" idx="1"/>
+          </p:nvPr>
+        </p:nvSpPr>
+        <p:spPr/>
+        <p:txBody>
+          <a:bodyPr/>
+          <a:lstStyle/>
+          <a:p>
+            <a:r>
+              <a:rPr lang="en-US" dirty="0"/>
+              <a:t>The patient starts with selected the date of surgery and type of surgery. </a:t>
+            </a:r>
+          </a:p>
+          <a:p>
+            <a:endParaRPr lang="en-US" dirty="0"/>
+          </a:p>
+          <a:p>
+            <a:r>
+              <a:rPr lang="en-US" dirty="0"/>
+              <a:t>This will determine the phase you enter.  There is a screening question and as along as you meet criteria, you can proceed with the exercises.  </a:t>
+            </a:r>
+          </a:p>
+          <a:p>
+            <a:endParaRPr lang="en-US" dirty="0"/>
+          </a:p>
+          <a:p>
+            <a:r>
+              <a:rPr lang="en-US" dirty="0"/>
+              <a:t>If you do not meet criteria, for example if pain levels are too high, the program will request for you to complete another action before you try again.  </a:t>
+            </a:r>
+          </a:p>
+          <a:p>
+            <a:endParaRPr lang="en-US" dirty="0"/>
+          </a:p>
+          <a:p>
+            <a:r>
+              <a:rPr lang="en-US" dirty="0"/>
+              <a:t>After 12 weeks, your precautions for total hip will be lifted. </a:t>
+            </a:r>
+          </a:p>
+          <a:p>
+            <a:endParaRPr lang="en-US" dirty="0"/>
+          </a:p>
+          <a:p>
+            <a:r>
+              <a:rPr lang="en-US" dirty="0"/>
+              <a:t>If you have returned to normal function, the program will end.  </a:t>
+            </a:r>
+          </a:p>
+        </p:txBody>
+      </p:sp>
+      <p:sp>
+        <p:nvSpPr>
+          <p:cNvPr id="4" name="Slide Number Placeholder 3"/>
+          <p:cNvSpPr>
+            <a:spLocks noGrp="1"/>
+          </p:cNvSpPr>
+          <p:nvPr>
+            <p:ph type="sldNum" sz="quarter" idx="5"/>
+          </p:nvPr>
+        </p:nvSpPr>
+        <p:spPr/>
+        <p:txBody>
+          <a:bodyPr/>
+          <a:lstStyle/>
+          <a:p>
+            <a:fld id="{6BD99F43-FFA2-D94E-9493-556FC2A4F32F}" type="slidenum">
+              <a:rPr lang="en-US" smtClean="0"/>
+              <a:t>4</a:t>
+            </a:fld>
+            <a:endParaRPr lang="en-US" dirty="0"/>
+          </a:p>
+        </p:txBody>
+      </p:sp>
+    </p:spTree>
+    <p:extLst>
+      <p:ext uri="{BB962C8B-B14F-4D97-AF65-F5344CB8AC3E}">
+        <p14:creationId xmlns:p14="http://schemas.microsoft.com/office/powerpoint/2010/main" val="146796380"/>
+      </p:ext>
+    </p:extLst>
+  </p:cSld>
+  <p:clrMapOvr>
+    <a:masterClrMapping/>
+  </p:clrMapOvr>
+</p:notes>
+</file>
+
+<file path=ppt/notesSlides/notesSlide5.xml><?xml version="1.0" encoding="utf-8"?>
 <p:notes xmlns:a="http://schemas.openxmlformats.org/drawingml/2006/main" xmlns:r="http://schemas.openxmlformats.org/officeDocument/2006/relationships" xmlns:p="http://schemas.openxmlformats.org/presentationml/2006/main">
   <p:cSld>
     <p:spTree>
@@ -1085,7 +1087,7 @@
           <a:p>
             <a:fld id="{6BD99F43-FFA2-D94E-9493-556FC2A4F32F}" type="slidenum">
               <a:rPr lang="en-US" smtClean="0"/>
-              <a:t>4</a:t>
+              <a:t>5</a:t>
             </a:fld>
             <a:endParaRPr lang="en-US" dirty="0"/>
           </a:p>
@@ -1095,137 +1097,6 @@
     <p:extLst>
       <p:ext uri="{BB962C8B-B14F-4D97-AF65-F5344CB8AC3E}">
         <p14:creationId xmlns:p14="http://schemas.microsoft.com/office/powerpoint/2010/main" val="694068799"/>
-      </p:ext>
-    </p:extLst>
-  </p:cSld>
-  <p:clrMapOvr>
-    <a:masterClrMapping/>
-  </p:clrMapOvr>
-</p:notes>
-</file>
-
-<file path=ppt/notesSlides/notesSlide5.xml><?xml version="1.0" encoding="utf-8"?>
-<p:notes xmlns:a="http://schemas.openxmlformats.org/drawingml/2006/main" xmlns:r="http://schemas.openxmlformats.org/officeDocument/2006/relationships" xmlns:p="http://schemas.openxmlformats.org/presentationml/2006/main">
-  <p:cSld>
-    <p:spTree>
-      <p:nvGrpSpPr>
-        <p:cNvPr id="1" name=""/>
-        <p:cNvGrpSpPr/>
-        <p:nvPr/>
-      </p:nvGrpSpPr>
-      <p:grpSpPr>
-        <a:xfrm>
-          <a:off x="0" y="0"/>
-          <a:ext cx="0" cy="0"/>
-          <a:chOff x="0" y="0"/>
-          <a:chExt cx="0" cy="0"/>
-        </a:xfrm>
-      </p:grpSpPr>
-      <p:sp>
-        <p:nvSpPr>
-          <p:cNvPr id="2" name="Slide Image Placeholder 1"/>
-          <p:cNvSpPr>
-            <a:spLocks noGrp="1" noRot="1" noChangeAspect="1"/>
-          </p:cNvSpPr>
-          <p:nvPr>
-            <p:ph type="sldImg"/>
-          </p:nvPr>
-        </p:nvSpPr>
-        <p:spPr/>
-      </p:sp>
-      <p:sp>
-        <p:nvSpPr>
-          <p:cNvPr id="3" name="Notes Placeholder 2"/>
-          <p:cNvSpPr>
-            <a:spLocks noGrp="1"/>
-          </p:cNvSpPr>
-          <p:nvPr>
-            <p:ph type="body" idx="1"/>
-          </p:nvPr>
-        </p:nvSpPr>
-        <p:spPr/>
-        <p:txBody>
-          <a:bodyPr/>
-          <a:lstStyle/>
-          <a:p>
-            <a:r>
-              <a:rPr lang="en-US" dirty="0"/>
-              <a:t>Here is an oversimplified sketch of </a:t>
-            </a:r>
-            <a:r>
-              <a:rPr lang="en-US" dirty="0" err="1"/>
-              <a:t>PostOp</a:t>
-            </a:r>
-            <a:r>
-              <a:rPr lang="en-US" dirty="0"/>
-              <a:t> Pal in action</a:t>
-            </a:r>
-          </a:p>
-          <a:p>
-            <a:r>
-              <a:rPr lang="en-US" dirty="0"/>
-              <a:t>You select your phase by entering the date of your surgery.  </a:t>
-            </a:r>
-          </a:p>
-          <a:p>
-            <a:r>
-              <a:rPr lang="en-US" dirty="0"/>
-              <a:t>The program will direct you to the appropriate phase of recovery.</a:t>
-            </a:r>
-          </a:p>
-          <a:p>
-            <a:r>
-              <a:rPr lang="en-US" dirty="0"/>
-              <a:t>Prompting questions will appear to ensure you are meeting criteria to complete program that day, or progress further, depending on your post op stage.</a:t>
-            </a:r>
-          </a:p>
-          <a:p>
-            <a:r>
-              <a:rPr lang="en-US" dirty="0"/>
-              <a:t>If you meet criteria, you will be able to start the program.  If not, it will tell you to try something else such as stretching until you can meet criteria.</a:t>
-            </a:r>
-          </a:p>
-          <a:p>
-            <a:r>
-              <a:rPr lang="en-US" dirty="0"/>
-              <a:t>Once you have met all criteria, you would progress to the next phase, assuming you are in the correct post-op days.</a:t>
-            </a:r>
-          </a:p>
-          <a:p>
-            <a:r>
-              <a:rPr lang="en-US" dirty="0"/>
-              <a:t>Once you have returned to normal function, the program will stop.</a:t>
-            </a:r>
-          </a:p>
-        </p:txBody>
-      </p:sp>
-      <p:sp>
-        <p:nvSpPr>
-          <p:cNvPr id="4" name="Slide Number Placeholder 3"/>
-          <p:cNvSpPr>
-            <a:spLocks noGrp="1"/>
-          </p:cNvSpPr>
-          <p:nvPr>
-            <p:ph type="sldNum" sz="quarter" idx="5"/>
-          </p:nvPr>
-        </p:nvSpPr>
-        <p:spPr/>
-        <p:txBody>
-          <a:bodyPr/>
-          <a:lstStyle/>
-          <a:p>
-            <a:fld id="{6BD99F43-FFA2-D94E-9493-556FC2A4F32F}" type="slidenum">
-              <a:rPr lang="en-US" smtClean="0"/>
-              <a:t>5</a:t>
-            </a:fld>
-            <a:endParaRPr lang="en-US" dirty="0"/>
-          </a:p>
-        </p:txBody>
-      </p:sp>
-    </p:spTree>
-    <p:extLst>
-      <p:ext uri="{BB962C8B-B14F-4D97-AF65-F5344CB8AC3E}">
-        <p14:creationId xmlns:p14="http://schemas.microsoft.com/office/powerpoint/2010/main" val="146796380"/>
       </p:ext>
     </p:extLst>
   </p:cSld>
@@ -14487,6 +14358,70 @@
           </a:p>
         </p:txBody>
       </p:sp>
+      <p:sp>
+        <p:nvSpPr>
+          <p:cNvPr id="2" name="Rectangle 1">
+            <a:extLst>
+              <a:ext uri="{FF2B5EF4-FFF2-40B4-BE49-F238E27FC236}">
+                <a16:creationId xmlns:a16="http://schemas.microsoft.com/office/drawing/2014/main" id="{B844F182-D5DE-0107-1485-876473D858F1}"/>
+              </a:ext>
+            </a:extLst>
+          </p:cNvPr>
+          <p:cNvSpPr/>
+          <p:nvPr/>
+        </p:nvSpPr>
+        <p:spPr>
+          <a:xfrm>
+            <a:off x="610049" y="288357"/>
+            <a:ext cx="3262432" cy="923330"/>
+          </a:xfrm>
+          <a:prstGeom prst="rect">
+            <a:avLst/>
+          </a:prstGeom>
+          <a:noFill/>
+        </p:spPr>
+        <p:txBody>
+          <a:bodyPr wrap="none" lIns="91440" tIns="45720" rIns="91440" bIns="45720">
+            <a:spAutoFit/>
+          </a:bodyPr>
+          <a:lstStyle/>
+          <a:p>
+            <a:pPr algn="ctr"/>
+            <a:r>
+              <a:rPr lang="en-US" sz="5400" b="1" cap="none" spc="0" dirty="0" err="1">
+                <a:ln w="0"/>
+                <a:solidFill>
+                  <a:schemeClr val="accent1"/>
+                </a:solidFill>
+                <a:effectLst>
+                  <a:outerShdw blurRad="38100" dist="25400" dir="5400000" algn="ctr" rotWithShape="0">
+                    <a:srgbClr val="6E747A">
+                      <a:alpha val="43000"/>
+                    </a:srgbClr>
+                  </a:outerShdw>
+                </a:effectLst>
+              </a:rPr>
+              <a:t>PostOp</a:t>
+            </a:r>
+            <a:r>
+              <a:rPr lang="en-US" sz="5400" b="1" cap="none" spc="0" dirty="0">
+                <a:ln w="0"/>
+                <a:solidFill>
+                  <a:schemeClr val="accent1"/>
+                </a:solidFill>
+                <a:effectLst>
+                  <a:outerShdw blurRad="38100" dist="25400" dir="5400000" algn="ctr" rotWithShape="0">
+                    <a:srgbClr val="6E747A">
+                      <a:alpha val="43000"/>
+                    </a:srgbClr>
+                  </a:outerShdw>
+                </a:effectLst>
+              </a:rPr>
+              <a:t> Pal</a:t>
+            </a:r>
+          </a:p>
+        </p:txBody>
+      </p:sp>
     </p:spTree>
     <p:extLst>
       <p:ext uri="{BB962C8B-B14F-4D97-AF65-F5344CB8AC3E}">
@@ -14570,114 +14505,6 @@
       </p:pic>
       <p:sp>
         <p:nvSpPr>
-          <p:cNvPr id="26" name="Content Placeholder 25">
-            <a:extLst>
-              <a:ext uri="{FF2B5EF4-FFF2-40B4-BE49-F238E27FC236}">
-                <a16:creationId xmlns:a16="http://schemas.microsoft.com/office/drawing/2014/main" id="{3A861CA2-05D4-AE97-2730-38B241E42CFB}"/>
-              </a:ext>
-            </a:extLst>
-          </p:cNvPr>
-          <p:cNvSpPr>
-            <a:spLocks noGrp="1"/>
-          </p:cNvSpPr>
-          <p:nvPr>
-            <p:ph sz="quarter" idx="13"/>
-          </p:nvPr>
-        </p:nvSpPr>
-        <p:spPr>
-          <a:xfrm>
-            <a:off x="5288314" y="1028700"/>
-            <a:ext cx="6450603" cy="4800600"/>
-          </a:xfrm>
-        </p:spPr>
-        <p:txBody>
-          <a:bodyPr/>
-          <a:lstStyle/>
-          <a:p>
-            <a:pPr>
-              <a:lnSpc>
-                <a:spcPct val="100000"/>
-              </a:lnSpc>
-            </a:pPr>
-            <a:r>
-              <a:rPr lang="en-US" sz="2400" b="0" spc="100" dirty="0">
-                <a:latin typeface="Univers Condensed" panose="020B0506020202050204" pitchFamily="34" charset="0"/>
-                <a:cs typeface="Calibri"/>
-              </a:rPr>
-              <a:t>Problem</a:t>
-            </a:r>
-          </a:p>
-          <a:p>
-            <a:pPr lvl="1">
-              <a:lnSpc>
-                <a:spcPct val="100000"/>
-              </a:lnSpc>
-            </a:pPr>
-            <a:r>
-              <a:rPr lang="en-US" spc="100" dirty="0">
-                <a:latin typeface="Univers Condensed" panose="020B0506020202050204" pitchFamily="34" charset="0"/>
-                <a:cs typeface="Calibri"/>
-              </a:rPr>
-              <a:t>Patients uninsured or under-insured</a:t>
-            </a:r>
-          </a:p>
-          <a:p>
-            <a:pPr lvl="1">
-              <a:lnSpc>
-                <a:spcPct val="100000"/>
-              </a:lnSpc>
-            </a:pPr>
-            <a:r>
-              <a:rPr lang="en-US" spc="100" dirty="0">
-                <a:latin typeface="Univers Condensed" panose="020B0506020202050204" pitchFamily="34" charset="0"/>
-                <a:cs typeface="Calibri"/>
-              </a:rPr>
-              <a:t>Don’t qualify for post-acute services</a:t>
-            </a:r>
-          </a:p>
-          <a:p>
-            <a:pPr lvl="1">
-              <a:lnSpc>
-                <a:spcPct val="100000"/>
-              </a:lnSpc>
-            </a:pPr>
-            <a:r>
-              <a:rPr lang="en-US" spc="100" dirty="0">
-                <a:latin typeface="Univers Condensed" panose="020B0506020202050204" pitchFamily="34" charset="0"/>
-                <a:cs typeface="Calibri"/>
-              </a:rPr>
-              <a:t>Discharge home from hospital with few resources</a:t>
-            </a:r>
-          </a:p>
-          <a:p>
-            <a:pPr lvl="1">
-              <a:lnSpc>
-                <a:spcPct val="100000"/>
-              </a:lnSpc>
-            </a:pPr>
-            <a:r>
-              <a:rPr lang="en-US" spc="100" dirty="0">
-                <a:latin typeface="Univers Condensed" panose="020B0506020202050204" pitchFamily="34" charset="0"/>
-                <a:cs typeface="Calibri"/>
-              </a:rPr>
-              <a:t>Overwhelmed by information and instructions</a:t>
-            </a:r>
-          </a:p>
-          <a:p>
-            <a:pPr>
-              <a:lnSpc>
-                <a:spcPct val="100000"/>
-              </a:lnSpc>
-            </a:pPr>
-            <a:endParaRPr lang="en-US" sz="2400" b="0" spc="100" dirty="0">
-              <a:latin typeface="Univers Condensed" panose="020B0506020202050204" pitchFamily="34" charset="0"/>
-              <a:cs typeface="Calibri"/>
-            </a:endParaRPr>
-          </a:p>
-        </p:txBody>
-      </p:sp>
-      <p:sp>
-        <p:nvSpPr>
           <p:cNvPr id="18" name="Rectangle 17">
             <a:extLst>
               <a:ext uri="{FF2B5EF4-FFF2-40B4-BE49-F238E27FC236}">
@@ -14757,17 +14584,198 @@
           <a:lstStyle/>
           <a:p>
             <a:r>
-              <a:rPr lang="en-US" sz="3200" dirty="0"/>
+              <a:rPr lang="en-US" sz="2000" dirty="0"/>
               <a:t>Judith </a:t>
             </a:r>
             <a:r>
-              <a:rPr lang="en-US" sz="3200" dirty="0" err="1"/>
+              <a:rPr lang="en-US" sz="2000" dirty="0" err="1"/>
               <a:t>southard</a:t>
             </a:r>
             <a:r>
-              <a:rPr lang="en-US" sz="3200" dirty="0"/>
+              <a:rPr lang="en-US" sz="2000" dirty="0"/>
               <a:t>, Pt, DPT</a:t>
             </a:r>
+          </a:p>
+        </p:txBody>
+      </p:sp>
+      <p:sp>
+        <p:nvSpPr>
+          <p:cNvPr id="2" name="Rectangle 1">
+            <a:extLst>
+              <a:ext uri="{FF2B5EF4-FFF2-40B4-BE49-F238E27FC236}">
+                <a16:creationId xmlns:a16="http://schemas.microsoft.com/office/drawing/2014/main" id="{BDD1424B-AB14-4D57-4946-3995FD4ADD86}"/>
+              </a:ext>
+            </a:extLst>
+          </p:cNvPr>
+          <p:cNvSpPr/>
+          <p:nvPr/>
+        </p:nvSpPr>
+        <p:spPr>
+          <a:xfrm>
+            <a:off x="5656815" y="291938"/>
+            <a:ext cx="3454793" cy="923330"/>
+          </a:xfrm>
+          <a:prstGeom prst="rect">
+            <a:avLst/>
+          </a:prstGeom>
+          <a:noFill/>
+        </p:spPr>
+        <p:txBody>
+          <a:bodyPr wrap="none" lIns="91440" tIns="45720" rIns="91440" bIns="45720">
+            <a:spAutoFit/>
+          </a:bodyPr>
+          <a:lstStyle/>
+          <a:p>
+            <a:pPr algn="ctr"/>
+            <a:r>
+              <a:rPr lang="en-US" sz="5400" b="1" dirty="0">
+                <a:ln w="0"/>
+                <a:solidFill>
+                  <a:schemeClr val="accent1"/>
+                </a:solidFill>
+                <a:effectLst>
+                  <a:outerShdw blurRad="38100" dist="25400" dir="5400000" algn="ctr" rotWithShape="0">
+                    <a:srgbClr val="6E747A">
+                      <a:alpha val="43000"/>
+                    </a:srgbClr>
+                  </a:outerShdw>
+                </a:effectLst>
+              </a:rPr>
+              <a:t>Gap in Care</a:t>
+            </a:r>
+            <a:endParaRPr lang="en-US" sz="5400" b="1" cap="none" spc="0" dirty="0">
+              <a:ln w="0"/>
+              <a:solidFill>
+                <a:schemeClr val="accent1"/>
+              </a:solidFill>
+              <a:effectLst>
+                <a:outerShdw blurRad="38100" dist="25400" dir="5400000" algn="ctr" rotWithShape="0">
+                  <a:srgbClr val="6E747A">
+                    <a:alpha val="43000"/>
+                  </a:srgbClr>
+                </a:outerShdw>
+              </a:effectLst>
+            </a:endParaRPr>
+          </a:p>
+        </p:txBody>
+      </p:sp>
+      <p:sp>
+        <p:nvSpPr>
+          <p:cNvPr id="5" name="Content Placeholder 4">
+            <a:extLst>
+              <a:ext uri="{FF2B5EF4-FFF2-40B4-BE49-F238E27FC236}">
+                <a16:creationId xmlns:a16="http://schemas.microsoft.com/office/drawing/2014/main" id="{06EFCF05-37A3-892A-BF95-8F6209E53859}"/>
+              </a:ext>
+            </a:extLst>
+          </p:cNvPr>
+          <p:cNvSpPr>
+            <a:spLocks noGrp="1"/>
+          </p:cNvSpPr>
+          <p:nvPr>
+            <p:ph sz="quarter" idx="13"/>
+          </p:nvPr>
+        </p:nvSpPr>
+        <p:spPr>
+          <a:xfrm>
+            <a:off x="5685066" y="982578"/>
+            <a:ext cx="5731058" cy="4800600"/>
+          </a:xfrm>
+        </p:spPr>
+        <p:txBody>
+          <a:bodyPr/>
+          <a:lstStyle/>
+          <a:p>
+            <a:endParaRPr lang="en-US" spc="100" dirty="0">
+              <a:latin typeface="Univers Condensed" panose="020B0506020202050204" pitchFamily="34" charset="0"/>
+              <a:cs typeface="Calibri"/>
+            </a:endParaRPr>
+          </a:p>
+          <a:p>
+            <a:r>
+              <a:rPr lang="en-US" spc="100" dirty="0">
+                <a:latin typeface="Univers Condensed" panose="020B0506020202050204" pitchFamily="34" charset="0"/>
+                <a:cs typeface="Calibri"/>
+              </a:rPr>
+              <a:t>Underserved population</a:t>
+            </a:r>
+          </a:p>
+          <a:p>
+            <a:pPr lvl="1"/>
+            <a:r>
+              <a:rPr lang="en-US" spc="100" dirty="0">
+                <a:latin typeface="Univers Condensed" panose="020B0506020202050204" pitchFamily="34" charset="0"/>
+                <a:cs typeface="Calibri"/>
+              </a:rPr>
+              <a:t>Un-insured or under-insured</a:t>
+            </a:r>
+          </a:p>
+          <a:p>
+            <a:pPr lvl="1"/>
+            <a:endParaRPr lang="en-US" spc="100" dirty="0">
+              <a:latin typeface="Univers Condensed" panose="020B0506020202050204" pitchFamily="34" charset="0"/>
+              <a:cs typeface="Calibri"/>
+            </a:endParaRPr>
+          </a:p>
+          <a:p>
+            <a:r>
+              <a:rPr lang="en-US" spc="100" dirty="0">
+                <a:latin typeface="Univers Condensed" panose="020B0506020202050204" pitchFamily="34" charset="0"/>
+                <a:cs typeface="Calibri"/>
+              </a:rPr>
+              <a:t>QUALITY Gap</a:t>
+            </a:r>
+          </a:p>
+          <a:p>
+            <a:pPr lvl="1">
+              <a:lnSpc>
+                <a:spcPct val="100000"/>
+              </a:lnSpc>
+            </a:pPr>
+            <a:r>
+              <a:rPr lang="en-US" spc="100" dirty="0">
+                <a:latin typeface="Univers Condensed" panose="020B0506020202050204" pitchFamily="34" charset="0"/>
+                <a:cs typeface="Calibri"/>
+              </a:rPr>
+              <a:t>Lack of access to resources</a:t>
+            </a:r>
+          </a:p>
+          <a:p>
+            <a:pPr marL="457200" lvl="1" indent="0">
+              <a:lnSpc>
+                <a:spcPct val="100000"/>
+              </a:lnSpc>
+              <a:buNone/>
+            </a:pPr>
+            <a:endParaRPr lang="en-US" spc="100" dirty="0">
+              <a:latin typeface="Univers Condensed" panose="020B0506020202050204" pitchFamily="34" charset="0"/>
+              <a:cs typeface="Calibri"/>
+            </a:endParaRPr>
+          </a:p>
+          <a:p>
+            <a:r>
+              <a:rPr lang="en-US" spc="100" dirty="0">
+                <a:latin typeface="Univers Condensed" panose="020B0506020202050204" pitchFamily="34" charset="0"/>
+                <a:cs typeface="Calibri"/>
+              </a:rPr>
+              <a:t>Informatics problem</a:t>
+            </a:r>
+          </a:p>
+          <a:p>
+            <a:pPr lvl="1">
+              <a:lnSpc>
+                <a:spcPct val="100000"/>
+              </a:lnSpc>
+            </a:pPr>
+            <a:r>
+              <a:rPr lang="en-US" spc="100" dirty="0">
+                <a:latin typeface="Univers Condensed" panose="020B0506020202050204" pitchFamily="34" charset="0"/>
+                <a:cs typeface="Calibri"/>
+              </a:rPr>
+              <a:t>Static home program</a:t>
+            </a:r>
+          </a:p>
+          <a:p>
+            <a:endParaRPr lang="en-US" dirty="0"/>
           </a:p>
         </p:txBody>
       </p:sp>
@@ -15105,8 +15113,34 @@
                 <a:latin typeface="Univers Condensed" panose="020B0506020202050204" pitchFamily="34" charset="0"/>
                 <a:cs typeface="Calibri"/>
               </a:rPr>
-              <a:t>LOW COST SOLUTION</a:t>
-            </a:r>
+              <a:t>LOW COST ACCESSIBILITY</a:t>
+            </a:r>
+          </a:p>
+          <a:p>
+            <a:pPr lvl="1">
+              <a:lnSpc>
+                <a:spcPct val="100000"/>
+              </a:lnSpc>
+            </a:pPr>
+            <a:r>
+              <a:rPr lang="en-US" spc="100" dirty="0">
+                <a:latin typeface="Univers Condensed" panose="020B0506020202050204" pitchFamily="34" charset="0"/>
+                <a:cs typeface="Calibri"/>
+              </a:rPr>
+              <a:t>Digital bridge</a:t>
+            </a:r>
+          </a:p>
+          <a:p>
+            <a:pPr marL="457200" lvl="1" indent="0">
+              <a:lnSpc>
+                <a:spcPct val="100000"/>
+              </a:lnSpc>
+              <a:buNone/>
+            </a:pPr>
+            <a:endParaRPr lang="en-US" spc="100" dirty="0">
+              <a:latin typeface="Univers Condensed" panose="020B0506020202050204" pitchFamily="34" charset="0"/>
+              <a:cs typeface="Calibri"/>
+            </a:endParaRPr>
           </a:p>
           <a:p>
             <a:pPr>
@@ -15119,7 +15153,7 @@
                 <a:latin typeface="Univers Condensed" panose="020B0506020202050204" pitchFamily="34" charset="0"/>
                 <a:cs typeface="Calibri"/>
               </a:rPr>
-              <a:t>GUIDE AND PROGRESS THROUGH PHASES OF RECOVERY</a:t>
+              <a:t>DYNAMIC GUIDANCE</a:t>
             </a:r>
           </a:p>
           <a:p>
@@ -15133,7 +15167,7 @@
                 <a:latin typeface="Univers Condensed" panose="020B0506020202050204" pitchFamily="34" charset="0"/>
                 <a:cs typeface="Calibri"/>
               </a:rPr>
-              <a:t>Home exercise program</a:t>
+              <a:t>Phased progressive home program</a:t>
             </a:r>
           </a:p>
           <a:p>
@@ -15147,7 +15181,7 @@
                 <a:latin typeface="Univers Condensed" panose="020B0506020202050204" pitchFamily="34" charset="0"/>
                 <a:cs typeface="Calibri"/>
               </a:rPr>
-              <a:t>Post-op care instructions</a:t>
+              <a:t>Inherent safety reminders</a:t>
             </a:r>
           </a:p>
           <a:p>
@@ -15156,12 +15190,23 @@
                 <a:spcPct val="100000"/>
               </a:lnSpc>
             </a:pPr>
+            <a:endParaRPr lang="en-US" spc="100" dirty="0">
+              <a:latin typeface="Univers Condensed" panose="020B0506020202050204" pitchFamily="34" charset="0"/>
+              <a:cs typeface="Calibri"/>
+            </a:endParaRPr>
+          </a:p>
+          <a:p>
+            <a:pPr>
+              <a:lnSpc>
+                <a:spcPct val="100000"/>
+              </a:lnSpc>
+            </a:pPr>
             <a:r>
               <a:rPr lang="en-US" spc="100" dirty="0">
                 <a:latin typeface="Univers Condensed" panose="020B0506020202050204" pitchFamily="34" charset="0"/>
                 <a:cs typeface="Calibri"/>
               </a:rPr>
-              <a:t>Safety precautions</a:t>
+              <a:t>ACTIVE MONITORING</a:t>
             </a:r>
           </a:p>
           <a:p>
@@ -15175,7 +15220,7 @@
                 <a:latin typeface="Univers Condensed" panose="020B0506020202050204" pitchFamily="34" charset="0"/>
                 <a:cs typeface="Calibri"/>
               </a:rPr>
-              <a:t>Reminder prompts</a:t>
+              <a:t>Post-Op Care Instructions</a:t>
             </a:r>
           </a:p>
           <a:p>
@@ -15189,7 +15234,7 @@
                 <a:latin typeface="Univers Condensed" panose="020B0506020202050204" pitchFamily="34" charset="0"/>
                 <a:cs typeface="Calibri"/>
               </a:rPr>
-              <a:t>Helpful tips/tricks</a:t>
+              <a:t>Precautions reminder</a:t>
             </a:r>
           </a:p>
           <a:p>
@@ -15399,7 +15444,7 @@
         </p:nvSpPr>
         <p:spPr>
           <a:xfrm>
-            <a:off x="6096000" y="6209425"/>
+            <a:off x="5206367" y="6195060"/>
             <a:ext cx="6802160" cy="432384"/>
           </a:xfrm>
           <a:custGeom>
@@ -15634,8 +15679,9 @@
             </a:lvl9pPr>
           </a:lstStyle>
           <a:p>
-            <a:r>
-              <a:rPr lang="en-US" sz="3200" b="1" dirty="0"/>
+            <a:pPr algn="r"/>
+            <a:r>
+              <a:rPr lang="en-US" sz="2000" b="1" dirty="0"/>
               <a:t>JUDITH SOUTHARD, PT, DPT</a:t>
             </a:r>
           </a:p>
@@ -15671,13 +15717,7 @@
   <p:cSld>
     <p:spTree>
       <p:nvGrpSpPr>
-        <p:cNvPr id="1" name="">
-          <a:extLst>
-            <a:ext uri="{FF2B5EF4-FFF2-40B4-BE49-F238E27FC236}">
-              <a16:creationId xmlns:a16="http://schemas.microsoft.com/office/drawing/2014/main" id="{CA024E9C-BBC2-EC9A-437F-AB3BDEF2307E}"/>
-            </a:ext>
-          </a:extLst>
-        </p:cNvPr>
+        <p:cNvPr id="1" name=""/>
         <p:cNvGrpSpPr/>
         <p:nvPr/>
       </p:nvGrpSpPr>
@@ -15689,59 +15729,12 @@
           <a:chExt cx="0" cy="0"/>
         </a:xfrm>
       </p:grpSpPr>
-      <p:pic>
-        <p:nvPicPr>
-          <p:cNvPr id="2050" name="Picture 2">
-            <a:extLst>
-              <a:ext uri="{FF2B5EF4-FFF2-40B4-BE49-F238E27FC236}">
-                <a16:creationId xmlns:a16="http://schemas.microsoft.com/office/drawing/2014/main" id="{A6CA792E-DD75-8C85-729A-BE5D152321A4}"/>
-              </a:ext>
-            </a:extLst>
-          </p:cNvPr>
-          <p:cNvPicPr>
-            <a:picLocks noChangeAspect="1" noChangeArrowheads="1"/>
-          </p:cNvPicPr>
-          <p:nvPr/>
-        </p:nvPicPr>
-        <p:blipFill>
-          <a:blip r:embed="rId3">
-            <a:extLst>
-              <a:ext uri="{28A0092B-C50C-407E-A947-70E740481C1C}">
-                <a14:useLocalDpi xmlns:a14="http://schemas.microsoft.com/office/drawing/2010/main" val="0"/>
-              </a:ext>
-            </a:extLst>
-          </a:blip>
-          <a:srcRect/>
-          <a:stretch>
-            <a:fillRect/>
-          </a:stretch>
-        </p:blipFill>
-        <p:spPr bwMode="auto">
-          <a:xfrm>
-            <a:off x="5772568" y="-5575"/>
-            <a:ext cx="10972800" cy="6858000"/>
-          </a:xfrm>
-          <a:prstGeom prst="rect">
-            <a:avLst/>
-          </a:prstGeom>
-          <a:noFill/>
-          <a:extLst>
-            <a:ext uri="{909E8E84-426E-40DD-AFC4-6F175D3DCCD1}">
-              <a14:hiddenFill xmlns:a14="http://schemas.microsoft.com/office/drawing/2010/main">
-                <a:solidFill>
-                  <a:srgbClr val="FFFFFF"/>
-                </a:solidFill>
-              </a14:hiddenFill>
-            </a:ext>
-          </a:extLst>
-        </p:spPr>
-      </p:pic>
-      <p:sp>
-        <p:nvSpPr>
-          <p:cNvPr id="5" name="Title 4">
-            <a:extLst>
-              <a:ext uri="{FF2B5EF4-FFF2-40B4-BE49-F238E27FC236}">
-                <a16:creationId xmlns:a16="http://schemas.microsoft.com/office/drawing/2014/main" id="{CA9E5733-F649-9B19-4C04-779836F7B175}"/>
+      <p:sp>
+        <p:nvSpPr>
+          <p:cNvPr id="3" name="Footer Placeholder 2">
+            <a:extLst>
+              <a:ext uri="{FF2B5EF4-FFF2-40B4-BE49-F238E27FC236}">
+                <a16:creationId xmlns:a16="http://schemas.microsoft.com/office/drawing/2014/main" id="{09672F13-D5A1-99D6-6699-F78CB161045F}"/>
               </a:ext>
             </a:extLst>
           </p:cNvPr>
@@ -15749,7 +15742,7 @@
             <a:spLocks noGrp="1"/>
           </p:cNvSpPr>
           <p:nvPr>
-            <p:ph type="title"/>
+            <p:ph type="ftr" sz="quarter" idx="10"/>
           </p:nvPr>
         </p:nvSpPr>
         <p:spPr/>
@@ -15757,19 +15750,49 @@
           <a:bodyPr/>
           <a:lstStyle/>
           <a:p>
-            <a:br>
+            <a:r>
               <a:rPr lang="en-US" dirty="0"/>
-            </a:br>
+              <a:t>Fitness Presentation</a:t>
+            </a:r>
+          </a:p>
+        </p:txBody>
+      </p:sp>
+      <p:sp>
+        <p:nvSpPr>
+          <p:cNvPr id="4" name="Slide Number Placeholder 3">
+            <a:extLst>
+              <a:ext uri="{FF2B5EF4-FFF2-40B4-BE49-F238E27FC236}">
+                <a16:creationId xmlns:a16="http://schemas.microsoft.com/office/drawing/2014/main" id="{A9C5863A-2239-B76D-E785-5A656F160FE0}"/>
+              </a:ext>
+            </a:extLst>
+          </p:cNvPr>
+          <p:cNvSpPr>
+            <a:spLocks noGrp="1"/>
+          </p:cNvSpPr>
+          <p:nvPr>
+            <p:ph type="sldNum" sz="quarter" idx="11"/>
+          </p:nvPr>
+        </p:nvSpPr>
+        <p:spPr/>
+        <p:txBody>
+          <a:bodyPr/>
+          <a:lstStyle/>
+          <a:p>
+            <a:fld id="{294A09A9-5501-47C1-A89A-A340965A2BE2}" type="slidenum">
+              <a:rPr lang="en-US" smtClean="0"/>
+              <a:pPr/>
+              <a:t>4</a:t>
+            </a:fld>
             <a:endParaRPr lang="en-US" dirty="0"/>
           </a:p>
         </p:txBody>
       </p:sp>
       <p:sp>
         <p:nvSpPr>
-          <p:cNvPr id="4" name="Rectangle 3">
-            <a:extLst>
-              <a:ext uri="{FF2B5EF4-FFF2-40B4-BE49-F238E27FC236}">
-                <a16:creationId xmlns:a16="http://schemas.microsoft.com/office/drawing/2014/main" id="{E1E3ED29-4A27-EE74-4282-67E1E369229E}"/>
+          <p:cNvPr id="16" name="Rectangle 15">
+            <a:extLst>
+              <a:ext uri="{FF2B5EF4-FFF2-40B4-BE49-F238E27FC236}">
+                <a16:creationId xmlns:a16="http://schemas.microsoft.com/office/drawing/2014/main" id="{189E1E3B-D35C-1288-B970-A29047BF26D5}"/>
               </a:ext>
             </a:extLst>
           </p:cNvPr>
@@ -15778,7 +15801,7 @@
         </p:nvSpPr>
         <p:spPr>
           <a:xfrm>
-            <a:off x="610049" y="288357"/>
+            <a:off x="375293" y="256139"/>
             <a:ext cx="3262432" cy="923330"/>
           </a:xfrm>
           <a:prstGeom prst="rect">
@@ -15830,10 +15853,10 @@
       </p:sp>
       <p:sp>
         <p:nvSpPr>
-          <p:cNvPr id="18" name="Content Placeholder 25">
-            <a:extLst>
-              <a:ext uri="{FF2B5EF4-FFF2-40B4-BE49-F238E27FC236}">
-                <a16:creationId xmlns:a16="http://schemas.microsoft.com/office/drawing/2014/main" id="{A00BBC95-F324-5DCC-D57B-8ECA9CF6C0DF}"/>
+          <p:cNvPr id="17" name="Content Placeholder 25">
+            <a:extLst>
+              <a:ext uri="{FF2B5EF4-FFF2-40B4-BE49-F238E27FC236}">
+                <a16:creationId xmlns:a16="http://schemas.microsoft.com/office/drawing/2014/main" id="{498B657C-3D4F-5BA1-B117-3DD4ECF4E841}"/>
               </a:ext>
             </a:extLst>
           </p:cNvPr>
@@ -16023,6 +16046,31 @@
                 <a:spcPct val="100000"/>
               </a:lnSpc>
             </a:pPr>
+            <a:r>
+              <a:rPr lang="en-US" spc="100" dirty="0">
+                <a:latin typeface="Univers Condensed" panose="020B0506020202050204" pitchFamily="34" charset="0"/>
+                <a:cs typeface="Calibri"/>
+              </a:rPr>
+              <a:t>Flow Diagram</a:t>
+            </a:r>
+          </a:p>
+          <a:p>
+            <a:pPr>
+              <a:lnSpc>
+                <a:spcPct val="100000"/>
+              </a:lnSpc>
+            </a:pPr>
+            <a:endParaRPr lang="en-US" spc="100" dirty="0">
+              <a:latin typeface="Univers Condensed" panose="020B0506020202050204" pitchFamily="34" charset="0"/>
+              <a:cs typeface="Calibri"/>
+            </a:endParaRPr>
+          </a:p>
+          <a:p>
+            <a:pPr>
+              <a:lnSpc>
+                <a:spcPct val="100000"/>
+              </a:lnSpc>
+            </a:pPr>
             <a:endParaRPr lang="en-US" sz="2400" spc="100" dirty="0">
               <a:latin typeface="Univers Condensed" panose="020B0506020202050204" pitchFamily="34" charset="0"/>
               <a:cs typeface="Calibri"/>
@@ -16032,381 +16080,94 @@
       </p:sp>
       <p:sp>
         <p:nvSpPr>
-          <p:cNvPr id="21" name="Rectangle 20">
-            <a:extLst>
-              <a:ext uri="{FF2B5EF4-FFF2-40B4-BE49-F238E27FC236}">
-                <a16:creationId xmlns:a16="http://schemas.microsoft.com/office/drawing/2014/main" id="{D385D05D-9BF4-FE9E-5E76-C35434B8A33E}"/>
-              </a:ext>
-            </a:extLst>
-          </p:cNvPr>
-          <p:cNvSpPr/>
+          <p:cNvPr id="18" name="Content Placeholder 17">
+            <a:extLst>
+              <a:ext uri="{FF2B5EF4-FFF2-40B4-BE49-F238E27FC236}">
+                <a16:creationId xmlns:a16="http://schemas.microsoft.com/office/drawing/2014/main" id="{B1818E3E-B394-EF81-CD0A-AE5DF3DD3827}"/>
+              </a:ext>
+            </a:extLst>
+          </p:cNvPr>
+          <p:cNvSpPr>
+            <a:spLocks noGrp="1"/>
+          </p:cNvSpPr>
+          <p:nvPr>
+            <p:ph sz="quarter" idx="12"/>
+          </p:nvPr>
+        </p:nvSpPr>
+        <p:spPr/>
+        <p:txBody>
+          <a:bodyPr/>
+          <a:lstStyle/>
+          <a:p>
+            <a:endParaRPr lang="en-US"/>
+          </a:p>
+        </p:txBody>
+      </p:sp>
+      <p:pic>
+        <p:nvPicPr>
+          <p:cNvPr id="1032" name="Picture 8">
+            <a:extLst>
+              <a:ext uri="{FF2B5EF4-FFF2-40B4-BE49-F238E27FC236}">
+                <a16:creationId xmlns:a16="http://schemas.microsoft.com/office/drawing/2014/main" id="{2296E1E8-0AA9-5909-250B-197ABAD350A0}"/>
+              </a:ext>
+            </a:extLst>
+          </p:cNvPr>
+          <p:cNvPicPr>
+            <a:picLocks noChangeAspect="1" noChangeArrowheads="1"/>
+          </p:cNvPicPr>
           <p:nvPr/>
-        </p:nvSpPr>
-        <p:spPr>
-          <a:xfrm>
-            <a:off x="11004883" y="6328423"/>
-            <a:ext cx="417095" cy="529578"/>
+        </p:nvPicPr>
+        <p:blipFill>
+          <a:blip r:embed="rId3">
+            <a:extLst>
+              <a:ext uri="{28A0092B-C50C-407E-A947-70E740481C1C}">
+                <a14:useLocalDpi xmlns:a14="http://schemas.microsoft.com/office/drawing/2010/main" val="0"/>
+              </a:ext>
+            </a:extLst>
+          </a:blip>
+          <a:srcRect/>
+          <a:stretch>
+            <a:fillRect/>
+          </a:stretch>
+        </p:blipFill>
+        <p:spPr bwMode="auto">
+          <a:xfrm>
+            <a:off x="3688099" y="-253951"/>
+            <a:ext cx="8776665" cy="7312477"/>
           </a:xfrm>
           <a:prstGeom prst="rect">
             <a:avLst/>
           </a:prstGeom>
-          <a:solidFill>
-            <a:schemeClr val="tx1"/>
-          </a:solidFill>
-          <a:ln>
-            <a:solidFill>
-              <a:schemeClr val="tx1"/>
-            </a:solidFill>
-          </a:ln>
-        </p:spPr>
-        <p:style>
-          <a:lnRef idx="2">
-            <a:schemeClr val="accent1">
-              <a:shade val="15000"/>
-            </a:schemeClr>
-          </a:lnRef>
-          <a:fillRef idx="1">
-            <a:schemeClr val="accent1"/>
-          </a:fillRef>
-          <a:effectRef idx="0">
-            <a:schemeClr val="accent1"/>
-          </a:effectRef>
-          <a:fontRef idx="minor">
-            <a:schemeClr val="lt1"/>
-          </a:fontRef>
-        </p:style>
-        <p:txBody>
-          <a:bodyPr rtlCol="0" anchor="ctr"/>
-          <a:lstStyle/>
-          <a:p>
-            <a:pPr algn="ctr"/>
-            <a:endParaRPr lang="en-US"/>
-          </a:p>
-        </p:txBody>
-      </p:sp>
-      <p:sp>
-        <p:nvSpPr>
-          <p:cNvPr id="2" name="Action Button: Go Forward or Next 1">
-            <a:hlinkClick r:id="rId4" action="ppaction://hlinkfile" highlightClick="1"/>
-            <a:extLst>
-              <a:ext uri="{FF2B5EF4-FFF2-40B4-BE49-F238E27FC236}">
-                <a16:creationId xmlns:a16="http://schemas.microsoft.com/office/drawing/2014/main" id="{89AEE8D4-B87E-AFD3-D94F-D1E946903B63}"/>
-              </a:ext>
-            </a:extLst>
-          </p:cNvPr>
-          <p:cNvSpPr/>
-          <p:nvPr/>
-        </p:nvSpPr>
-        <p:spPr>
-          <a:xfrm>
-            <a:off x="1170879" y="2743199"/>
-            <a:ext cx="1750742" cy="1694985"/>
-          </a:xfrm>
-          <a:prstGeom prst="actionButtonForwardNext">
-            <a:avLst/>
-          </a:prstGeom>
-        </p:spPr>
-        <p:style>
-          <a:lnRef idx="2">
-            <a:schemeClr val="accent1">
-              <a:shade val="15000"/>
-            </a:schemeClr>
-          </a:lnRef>
-          <a:fillRef idx="1">
-            <a:schemeClr val="accent1"/>
-          </a:fillRef>
-          <a:effectRef idx="0">
-            <a:schemeClr val="accent1"/>
-          </a:effectRef>
-          <a:fontRef idx="minor">
-            <a:schemeClr val="lt1"/>
-          </a:fontRef>
-        </p:style>
-        <p:txBody>
-          <a:bodyPr rtlCol="0" anchor="ctr"/>
-          <a:lstStyle/>
-          <a:p>
-            <a:pPr algn="ctr"/>
-            <a:endParaRPr lang="en-US"/>
-          </a:p>
-        </p:txBody>
-      </p:sp>
-      <p:sp>
-        <p:nvSpPr>
-          <p:cNvPr id="22" name="Footer Placeholder 3">
-            <a:extLst>
-              <a:ext uri="{FF2B5EF4-FFF2-40B4-BE49-F238E27FC236}">
-                <a16:creationId xmlns:a16="http://schemas.microsoft.com/office/drawing/2014/main" id="{E3E683A0-F495-ABF4-817A-D9DDFD679A27}"/>
-              </a:ext>
-            </a:extLst>
-          </p:cNvPr>
-          <p:cNvSpPr txBox="1">
-            <a:spLocks/>
-          </p:cNvSpPr>
-          <p:nvPr/>
-        </p:nvSpPr>
-        <p:spPr>
-          <a:xfrm>
-            <a:off x="6096000" y="6209425"/>
-            <a:ext cx="6802160" cy="432384"/>
-          </a:xfrm>
-          <a:custGeom>
-            <a:avLst/>
-            <a:gdLst>
-              <a:gd name="connsiteX0" fmla="*/ 0 w 5213477"/>
-              <a:gd name="connsiteY0" fmla="*/ 0 h 6858000"/>
-              <a:gd name="connsiteX1" fmla="*/ 1268595 w 5213477"/>
-              <a:gd name="connsiteY1" fmla="*/ 0 h 6858000"/>
-              <a:gd name="connsiteX2" fmla="*/ 5213477 w 5213477"/>
-              <a:gd name="connsiteY2" fmla="*/ 1133731 h 6858000"/>
-              <a:gd name="connsiteX3" fmla="*/ 5213477 w 5213477"/>
-              <a:gd name="connsiteY3" fmla="*/ 5245005 h 6858000"/>
-              <a:gd name="connsiteX4" fmla="*/ 3534514 w 5213477"/>
-              <a:gd name="connsiteY4" fmla="*/ 6858000 h 6858000"/>
-              <a:gd name="connsiteX5" fmla="*/ 1676654 w 5213477"/>
-              <a:gd name="connsiteY5" fmla="*/ 6858000 h 6858000"/>
-            </a:gdLst>
-            <a:ahLst/>
-            <a:cxnLst>
-              <a:cxn ang="0">
-                <a:pos x="connsiteX0" y="connsiteY0"/>
-              </a:cxn>
-              <a:cxn ang="0">
-                <a:pos x="connsiteX1" y="connsiteY1"/>
-              </a:cxn>
-              <a:cxn ang="0">
-                <a:pos x="connsiteX2" y="connsiteY2"/>
-              </a:cxn>
-              <a:cxn ang="0">
-                <a:pos x="connsiteX3" y="connsiteY3"/>
-              </a:cxn>
-              <a:cxn ang="0">
-                <a:pos x="connsiteX4" y="connsiteY4"/>
-              </a:cxn>
-              <a:cxn ang="0">
-                <a:pos x="connsiteX5" y="connsiteY5"/>
-              </a:cxn>
-            </a:cxnLst>
-            <a:rect l="l" t="t" r="r" b="b"/>
-            <a:pathLst>
-              <a:path w="5213477" h="6858000">
-                <a:moveTo>
-                  <a:pt x="0" y="0"/>
-                </a:moveTo>
-                <a:lnTo>
-                  <a:pt x="1268595" y="0"/>
-                </a:lnTo>
-                <a:lnTo>
-                  <a:pt x="5213477" y="1133731"/>
-                </a:lnTo>
-                <a:lnTo>
-                  <a:pt x="5213477" y="5245005"/>
-                </a:lnTo>
-                <a:lnTo>
-                  <a:pt x="3534514" y="6858000"/>
-                </a:lnTo>
-                <a:lnTo>
-                  <a:pt x="1676654" y="6858000"/>
-                </a:lnTo>
-                <a:close/>
-              </a:path>
-            </a:pathLst>
-          </a:custGeom>
-        </p:spPr>
-        <p:txBody>
-          <a:bodyPr vert="horz" wrap="square" lIns="91440" tIns="45720" rIns="91440" bIns="45720" rtlCol="0" anchor="ctr">
-            <a:noAutofit/>
-          </a:bodyPr>
-          <a:lstStyle>
-            <a:lvl1pPr marL="0" indent="0" algn="ctr" defTabSz="914400" rtl="0" eaLnBrk="1" latinLnBrk="0" hangingPunct="1">
-              <a:lnSpc>
-                <a:spcPct val="90000"/>
-              </a:lnSpc>
-              <a:spcBef>
-                <a:spcPts val="1000"/>
-              </a:spcBef>
-              <a:buFont typeface="Arial" panose="020B0604020202020204" pitchFamily="34" charset="0"/>
-              <a:buNone/>
-              <a:defRPr sz="1800" b="0" i="0" kern="1200">
+          <a:noFill/>
+          <a:extLst>
+            <a:ext uri="{909E8E84-426E-40DD-AFC4-6F175D3DCCD1}">
+              <a14:hiddenFill xmlns:a14="http://schemas.microsoft.com/office/drawing/2010/main">
                 <a:solidFill>
-                  <a:schemeClr val="bg1"/>
+                  <a:srgbClr val="FFFFFF"/>
                 </a:solidFill>
-                <a:latin typeface="+mn-lt"/>
-                <a:ea typeface="+mn-ea"/>
-                <a:cs typeface="+mn-cs"/>
-              </a:defRPr>
-            </a:lvl1pPr>
-            <a:lvl2pPr marL="685800" indent="-228600" algn="l" defTabSz="914400" rtl="0" eaLnBrk="1" latinLnBrk="0" hangingPunct="1">
-              <a:lnSpc>
-                <a:spcPct val="90000"/>
-              </a:lnSpc>
-              <a:spcBef>
-                <a:spcPts val="500"/>
-              </a:spcBef>
-              <a:buFont typeface="Arial" panose="020B0604020202020204" pitchFamily="34" charset="0"/>
-              <a:buChar char="•"/>
-              <a:defRPr sz="2400" b="0" i="0" kern="1200">
-                <a:solidFill>
-                  <a:schemeClr val="bg1"/>
-                </a:solidFill>
-                <a:latin typeface="+mn-lt"/>
-                <a:ea typeface="+mn-ea"/>
-                <a:cs typeface="+mn-cs"/>
-              </a:defRPr>
-            </a:lvl2pPr>
-            <a:lvl3pPr marL="1143000" indent="-228600" algn="l" defTabSz="914400" rtl="0" eaLnBrk="1" latinLnBrk="0" hangingPunct="1">
-              <a:lnSpc>
-                <a:spcPct val="90000"/>
-              </a:lnSpc>
-              <a:spcBef>
-                <a:spcPts val="500"/>
-              </a:spcBef>
-              <a:buFont typeface="Arial" panose="020B0604020202020204" pitchFamily="34" charset="0"/>
-              <a:buChar char="•"/>
-              <a:defRPr sz="2000" b="0" i="0" kern="1200">
-                <a:solidFill>
-                  <a:schemeClr val="bg1"/>
-                </a:solidFill>
-                <a:latin typeface="+mn-lt"/>
-                <a:ea typeface="+mn-ea"/>
-                <a:cs typeface="+mn-cs"/>
-              </a:defRPr>
-            </a:lvl3pPr>
-            <a:lvl4pPr marL="1600200" indent="-228600" algn="l" defTabSz="914400" rtl="0" eaLnBrk="1" latinLnBrk="0" hangingPunct="1">
-              <a:lnSpc>
-                <a:spcPct val="90000"/>
-              </a:lnSpc>
-              <a:spcBef>
-                <a:spcPts val="500"/>
-              </a:spcBef>
-              <a:buFont typeface="Arial" panose="020B0604020202020204" pitchFamily="34" charset="0"/>
-              <a:buChar char="•"/>
-              <a:defRPr sz="1800" b="0" i="0" kern="1200">
-                <a:solidFill>
-                  <a:schemeClr val="bg1"/>
-                </a:solidFill>
-                <a:latin typeface="+mn-lt"/>
-                <a:ea typeface="+mn-ea"/>
-                <a:cs typeface="+mn-cs"/>
-              </a:defRPr>
-            </a:lvl4pPr>
-            <a:lvl5pPr marL="2057400" indent="-228600" algn="l" defTabSz="914400" rtl="0" eaLnBrk="1" latinLnBrk="0" hangingPunct="1">
-              <a:lnSpc>
-                <a:spcPct val="90000"/>
-              </a:lnSpc>
-              <a:spcBef>
-                <a:spcPts val="500"/>
-              </a:spcBef>
-              <a:buFont typeface="Arial" panose="020B0604020202020204" pitchFamily="34" charset="0"/>
-              <a:buChar char="•"/>
-              <a:defRPr sz="1800" b="0" i="0" kern="1200">
-                <a:solidFill>
-                  <a:schemeClr val="bg1"/>
-                </a:solidFill>
-                <a:latin typeface="+mn-lt"/>
-                <a:ea typeface="+mn-ea"/>
-                <a:cs typeface="+mn-cs"/>
-              </a:defRPr>
-            </a:lvl5pPr>
-            <a:lvl6pPr marL="2514600" indent="-228600" algn="l" defTabSz="914400" rtl="0" eaLnBrk="1" latinLnBrk="0" hangingPunct="1">
-              <a:lnSpc>
-                <a:spcPct val="90000"/>
-              </a:lnSpc>
-              <a:spcBef>
-                <a:spcPts val="500"/>
-              </a:spcBef>
-              <a:buFont typeface="Arial" panose="020B0604020202020204" pitchFamily="34" charset="0"/>
-              <a:buChar char="•"/>
-              <a:defRPr sz="1800" kern="1200">
-                <a:solidFill>
-                  <a:schemeClr val="tx1"/>
-                </a:solidFill>
-                <a:latin typeface="+mn-lt"/>
-                <a:ea typeface="+mn-ea"/>
-                <a:cs typeface="+mn-cs"/>
-              </a:defRPr>
-            </a:lvl6pPr>
-            <a:lvl7pPr marL="2971800" indent="-228600" algn="l" defTabSz="914400" rtl="0" eaLnBrk="1" latinLnBrk="0" hangingPunct="1">
-              <a:lnSpc>
-                <a:spcPct val="90000"/>
-              </a:lnSpc>
-              <a:spcBef>
-                <a:spcPts val="500"/>
-              </a:spcBef>
-              <a:buFont typeface="Arial" panose="020B0604020202020204" pitchFamily="34" charset="0"/>
-              <a:buChar char="•"/>
-              <a:defRPr sz="1800" kern="1200">
-                <a:solidFill>
-                  <a:schemeClr val="tx1"/>
-                </a:solidFill>
-                <a:latin typeface="+mn-lt"/>
-                <a:ea typeface="+mn-ea"/>
-                <a:cs typeface="+mn-cs"/>
-              </a:defRPr>
-            </a:lvl7pPr>
-            <a:lvl8pPr marL="3429000" indent="-228600" algn="l" defTabSz="914400" rtl="0" eaLnBrk="1" latinLnBrk="0" hangingPunct="1">
-              <a:lnSpc>
-                <a:spcPct val="90000"/>
-              </a:lnSpc>
-              <a:spcBef>
-                <a:spcPts val="500"/>
-              </a:spcBef>
-              <a:buFont typeface="Arial" panose="020B0604020202020204" pitchFamily="34" charset="0"/>
-              <a:buChar char="•"/>
-              <a:defRPr sz="1800" kern="1200">
-                <a:solidFill>
-                  <a:schemeClr val="tx1"/>
-                </a:solidFill>
-                <a:latin typeface="+mn-lt"/>
-                <a:ea typeface="+mn-ea"/>
-                <a:cs typeface="+mn-cs"/>
-              </a:defRPr>
-            </a:lvl8pPr>
-            <a:lvl9pPr marL="3886200" indent="-228600" algn="l" defTabSz="914400" rtl="0" eaLnBrk="1" latinLnBrk="0" hangingPunct="1">
-              <a:lnSpc>
-                <a:spcPct val="90000"/>
-              </a:lnSpc>
-              <a:spcBef>
-                <a:spcPts val="500"/>
-              </a:spcBef>
-              <a:buFont typeface="Arial" panose="020B0604020202020204" pitchFamily="34" charset="0"/>
-              <a:buChar char="•"/>
-              <a:defRPr sz="1800" kern="1200">
-                <a:solidFill>
-                  <a:schemeClr val="tx1"/>
-                </a:solidFill>
-                <a:latin typeface="+mn-lt"/>
-                <a:ea typeface="+mn-ea"/>
-                <a:cs typeface="+mn-cs"/>
-              </a:defRPr>
-            </a:lvl9pPr>
-          </a:lstStyle>
-          <a:p>
-            <a:r>
-              <a:rPr lang="en-US" sz="3200" b="1" dirty="0"/>
-              <a:t>JUDITH SOUTHARD, PT, DPT</a:t>
-            </a:r>
-          </a:p>
-        </p:txBody>
-      </p:sp>
+              </a14:hiddenFill>
+            </a:ext>
+          </a:extLst>
+        </p:spPr>
+      </p:pic>
     </p:spTree>
     <p:extLst>
       <p:ext uri="{BB962C8B-B14F-4D97-AF65-F5344CB8AC3E}">
-        <p14:creationId xmlns:p14="http://schemas.microsoft.com/office/powerpoint/2010/main" val="1270566776"/>
+        <p14:creationId xmlns:p14="http://schemas.microsoft.com/office/powerpoint/2010/main" val="1789441374"/>
       </p:ext>
     </p:extLst>
   </p:cSld>
   <p:clrMapOvr>
     <a:masterClrMapping/>
   </p:clrMapOvr>
-  <mc:AlternateContent xmlns:mc="http://schemas.openxmlformats.org/markup-compatibility/2006" xmlns:p14="http://schemas.microsoft.com/office/powerpoint/2010/main">
-    <mc:Choice Requires="p14">
-      <p:transition spd="med" p14:dur="700">
-        <p:fade/>
+  <mc:AlternateContent xmlns:mc="http://schemas.openxmlformats.org/markup-compatibility/2006" xmlns:p159="http://schemas.microsoft.com/office/powerpoint/2015/09/main">
+    <mc:Choice Requires="p159">
+      <p:transition xmlns:p14="http://schemas.microsoft.com/office/powerpoint/2010/main" spd="slow" p14:dur="2000">
+        <p159:morph option="byObject"/>
       </p:transition>
     </mc:Choice>
     <mc:Fallback xmlns="">
-      <p:transition spd="med">
+      <p:transition spd="slow">
         <p:fade/>
       </p:transition>
     </mc:Fallback>
@@ -16419,7 +16180,13 @@
   <p:cSld>
     <p:spTree>
       <p:nvGrpSpPr>
-        <p:cNvPr id="1" name=""/>
+        <p:cNvPr id="1" name="">
+          <a:extLst>
+            <a:ext uri="{FF2B5EF4-FFF2-40B4-BE49-F238E27FC236}">
+              <a16:creationId xmlns:a16="http://schemas.microsoft.com/office/drawing/2014/main" id="{CA024E9C-BBC2-EC9A-437F-AB3BDEF2307E}"/>
+            </a:ext>
+          </a:extLst>
+        </p:cNvPr>
         <p:cNvGrpSpPr/>
         <p:nvPr/>
       </p:nvGrpSpPr>
@@ -16431,12 +16198,59 @@
           <a:chExt cx="0" cy="0"/>
         </a:xfrm>
       </p:grpSpPr>
-      <p:sp>
-        <p:nvSpPr>
-          <p:cNvPr id="3" name="Footer Placeholder 2">
-            <a:extLst>
-              <a:ext uri="{FF2B5EF4-FFF2-40B4-BE49-F238E27FC236}">
-                <a16:creationId xmlns:a16="http://schemas.microsoft.com/office/drawing/2014/main" id="{09672F13-D5A1-99D6-6699-F78CB161045F}"/>
+      <p:pic>
+        <p:nvPicPr>
+          <p:cNvPr id="2050" name="Picture 2">
+            <a:extLst>
+              <a:ext uri="{FF2B5EF4-FFF2-40B4-BE49-F238E27FC236}">
+                <a16:creationId xmlns:a16="http://schemas.microsoft.com/office/drawing/2014/main" id="{A6CA792E-DD75-8C85-729A-BE5D152321A4}"/>
+              </a:ext>
+            </a:extLst>
+          </p:cNvPr>
+          <p:cNvPicPr>
+            <a:picLocks noChangeAspect="1" noChangeArrowheads="1"/>
+          </p:cNvPicPr>
+          <p:nvPr/>
+        </p:nvPicPr>
+        <p:blipFill>
+          <a:blip r:embed="rId3">
+            <a:extLst>
+              <a:ext uri="{28A0092B-C50C-407E-A947-70E740481C1C}">
+                <a14:useLocalDpi xmlns:a14="http://schemas.microsoft.com/office/drawing/2010/main" val="0"/>
+              </a:ext>
+            </a:extLst>
+          </a:blip>
+          <a:srcRect/>
+          <a:stretch>
+            <a:fillRect/>
+          </a:stretch>
+        </p:blipFill>
+        <p:spPr bwMode="auto">
+          <a:xfrm>
+            <a:off x="5772568" y="-5575"/>
+            <a:ext cx="10972800" cy="6858000"/>
+          </a:xfrm>
+          <a:prstGeom prst="rect">
+            <a:avLst/>
+          </a:prstGeom>
+          <a:noFill/>
+          <a:extLst>
+            <a:ext uri="{909E8E84-426E-40DD-AFC4-6F175D3DCCD1}">
+              <a14:hiddenFill xmlns:a14="http://schemas.microsoft.com/office/drawing/2010/main">
+                <a:solidFill>
+                  <a:srgbClr val="FFFFFF"/>
+                </a:solidFill>
+              </a14:hiddenFill>
+            </a:ext>
+          </a:extLst>
+        </p:spPr>
+      </p:pic>
+      <p:sp>
+        <p:nvSpPr>
+          <p:cNvPr id="5" name="Title 4">
+            <a:extLst>
+              <a:ext uri="{FF2B5EF4-FFF2-40B4-BE49-F238E27FC236}">
+                <a16:creationId xmlns:a16="http://schemas.microsoft.com/office/drawing/2014/main" id="{CA9E5733-F649-9B19-4C04-779836F7B175}"/>
               </a:ext>
             </a:extLst>
           </p:cNvPr>
@@ -16444,7 +16258,7 @@
             <a:spLocks noGrp="1"/>
           </p:cNvSpPr>
           <p:nvPr>
-            <p:ph type="ftr" sz="quarter" idx="10"/>
+            <p:ph type="title"/>
           </p:nvPr>
         </p:nvSpPr>
         <p:spPr/>
@@ -16452,49 +16266,19 @@
           <a:bodyPr/>
           <a:lstStyle/>
           <a:p>
-            <a:r>
+            <a:br>
               <a:rPr lang="en-US" dirty="0"/>
-              <a:t>Fitness Presentation</a:t>
-            </a:r>
-          </a:p>
-        </p:txBody>
-      </p:sp>
-      <p:sp>
-        <p:nvSpPr>
-          <p:cNvPr id="4" name="Slide Number Placeholder 3">
-            <a:extLst>
-              <a:ext uri="{FF2B5EF4-FFF2-40B4-BE49-F238E27FC236}">
-                <a16:creationId xmlns:a16="http://schemas.microsoft.com/office/drawing/2014/main" id="{A9C5863A-2239-B76D-E785-5A656F160FE0}"/>
-              </a:ext>
-            </a:extLst>
-          </p:cNvPr>
-          <p:cNvSpPr>
-            <a:spLocks noGrp="1"/>
-          </p:cNvSpPr>
-          <p:nvPr>
-            <p:ph type="sldNum" sz="quarter" idx="11"/>
-          </p:nvPr>
-        </p:nvSpPr>
-        <p:spPr/>
-        <p:txBody>
-          <a:bodyPr/>
-          <a:lstStyle/>
-          <a:p>
-            <a:fld id="{294A09A9-5501-47C1-A89A-A340965A2BE2}" type="slidenum">
-              <a:rPr lang="en-US" smtClean="0"/>
-              <a:pPr/>
-              <a:t>5</a:t>
-            </a:fld>
+            </a:br>
             <a:endParaRPr lang="en-US" dirty="0"/>
           </a:p>
         </p:txBody>
       </p:sp>
       <p:sp>
         <p:nvSpPr>
-          <p:cNvPr id="16" name="Rectangle 15">
-            <a:extLst>
-              <a:ext uri="{FF2B5EF4-FFF2-40B4-BE49-F238E27FC236}">
-                <a16:creationId xmlns:a16="http://schemas.microsoft.com/office/drawing/2014/main" id="{189E1E3B-D35C-1288-B970-A29047BF26D5}"/>
+          <p:cNvPr id="4" name="Rectangle 3">
+            <a:extLst>
+              <a:ext uri="{FF2B5EF4-FFF2-40B4-BE49-F238E27FC236}">
+                <a16:creationId xmlns:a16="http://schemas.microsoft.com/office/drawing/2014/main" id="{E1E3ED29-4A27-EE74-4282-67E1E369229E}"/>
               </a:ext>
             </a:extLst>
           </p:cNvPr>
@@ -16503,7 +16287,7 @@
         </p:nvSpPr>
         <p:spPr>
           <a:xfrm>
-            <a:off x="375293" y="256139"/>
+            <a:off x="610049" y="288357"/>
             <a:ext cx="3262432" cy="923330"/>
           </a:xfrm>
           <a:prstGeom prst="rect">
@@ -16555,10 +16339,10 @@
       </p:sp>
       <p:sp>
         <p:nvSpPr>
-          <p:cNvPr id="17" name="Content Placeholder 25">
-            <a:extLst>
-              <a:ext uri="{FF2B5EF4-FFF2-40B4-BE49-F238E27FC236}">
-                <a16:creationId xmlns:a16="http://schemas.microsoft.com/office/drawing/2014/main" id="{498B657C-3D4F-5BA1-B117-3DD4ECF4E841}"/>
+          <p:cNvPr id="18" name="Content Placeholder 25">
+            <a:extLst>
+              <a:ext uri="{FF2B5EF4-FFF2-40B4-BE49-F238E27FC236}">
+                <a16:creationId xmlns:a16="http://schemas.microsoft.com/office/drawing/2014/main" id="{A00BBC95-F324-5DCC-D57B-8ECA9CF6C0DF}"/>
               </a:ext>
             </a:extLst>
           </p:cNvPr>
@@ -16748,31 +16532,6 @@
                 <a:spcPct val="100000"/>
               </a:lnSpc>
             </a:pPr>
-            <a:r>
-              <a:rPr lang="en-US" spc="100" dirty="0">
-                <a:latin typeface="Univers Condensed" panose="020B0506020202050204" pitchFamily="34" charset="0"/>
-                <a:cs typeface="Calibri"/>
-              </a:rPr>
-              <a:t>Flow Diagram</a:t>
-            </a:r>
-          </a:p>
-          <a:p>
-            <a:pPr>
-              <a:lnSpc>
-                <a:spcPct val="100000"/>
-              </a:lnSpc>
-            </a:pPr>
-            <a:endParaRPr lang="en-US" spc="100" dirty="0">
-              <a:latin typeface="Univers Condensed" panose="020B0506020202050204" pitchFamily="34" charset="0"/>
-              <a:cs typeface="Calibri"/>
-            </a:endParaRPr>
-          </a:p>
-          <a:p>
-            <a:pPr>
-              <a:lnSpc>
-                <a:spcPct val="100000"/>
-              </a:lnSpc>
-            </a:pPr>
             <a:endParaRPr lang="en-US" sz="2400" spc="100" dirty="0">
               <a:latin typeface="Univers Condensed" panose="020B0506020202050204" pitchFamily="34" charset="0"/>
               <a:cs typeface="Calibri"/>
@@ -16782,94 +16541,381 @@
       </p:sp>
       <p:sp>
         <p:nvSpPr>
-          <p:cNvPr id="18" name="Content Placeholder 17">
-            <a:extLst>
-              <a:ext uri="{FF2B5EF4-FFF2-40B4-BE49-F238E27FC236}">
-                <a16:creationId xmlns:a16="http://schemas.microsoft.com/office/drawing/2014/main" id="{B1818E3E-B394-EF81-CD0A-AE5DF3DD3827}"/>
-              </a:ext>
-            </a:extLst>
-          </p:cNvPr>
-          <p:cNvSpPr>
-            <a:spLocks noGrp="1"/>
-          </p:cNvSpPr>
-          <p:nvPr>
-            <p:ph sz="quarter" idx="12"/>
-          </p:nvPr>
-        </p:nvSpPr>
-        <p:spPr/>
-        <p:txBody>
-          <a:bodyPr/>
-          <a:lstStyle/>
-          <a:p>
-            <a:endParaRPr lang="en-US"/>
-          </a:p>
-        </p:txBody>
-      </p:sp>
-      <p:pic>
-        <p:nvPicPr>
-          <p:cNvPr id="1032" name="Picture 8">
-            <a:extLst>
-              <a:ext uri="{FF2B5EF4-FFF2-40B4-BE49-F238E27FC236}">
-                <a16:creationId xmlns:a16="http://schemas.microsoft.com/office/drawing/2014/main" id="{2296E1E8-0AA9-5909-250B-197ABAD350A0}"/>
-              </a:ext>
-            </a:extLst>
-          </p:cNvPr>
-          <p:cNvPicPr>
-            <a:picLocks noChangeAspect="1" noChangeArrowheads="1"/>
-          </p:cNvPicPr>
+          <p:cNvPr id="21" name="Rectangle 20">
+            <a:extLst>
+              <a:ext uri="{FF2B5EF4-FFF2-40B4-BE49-F238E27FC236}">
+                <a16:creationId xmlns:a16="http://schemas.microsoft.com/office/drawing/2014/main" id="{D385D05D-9BF4-FE9E-5E76-C35434B8A33E}"/>
+              </a:ext>
+            </a:extLst>
+          </p:cNvPr>
+          <p:cNvSpPr/>
           <p:nvPr/>
-        </p:nvPicPr>
-        <p:blipFill>
-          <a:blip r:embed="rId3">
-            <a:extLst>
-              <a:ext uri="{28A0092B-C50C-407E-A947-70E740481C1C}">
-                <a14:useLocalDpi xmlns:a14="http://schemas.microsoft.com/office/drawing/2010/main" val="0"/>
-              </a:ext>
-            </a:extLst>
-          </a:blip>
-          <a:srcRect/>
-          <a:stretch>
-            <a:fillRect/>
-          </a:stretch>
-        </p:blipFill>
-        <p:spPr bwMode="auto">
-          <a:xfrm>
-            <a:off x="3688099" y="-253951"/>
-            <a:ext cx="8776665" cy="7312477"/>
+        </p:nvSpPr>
+        <p:spPr>
+          <a:xfrm>
+            <a:off x="11004883" y="6328423"/>
+            <a:ext cx="417095" cy="529578"/>
           </a:xfrm>
           <a:prstGeom prst="rect">
             <a:avLst/>
           </a:prstGeom>
-          <a:noFill/>
-          <a:extLst>
-            <a:ext uri="{909E8E84-426E-40DD-AFC4-6F175D3DCCD1}">
-              <a14:hiddenFill xmlns:a14="http://schemas.microsoft.com/office/drawing/2010/main">
+          <a:solidFill>
+            <a:schemeClr val="tx1"/>
+          </a:solidFill>
+          <a:ln>
+            <a:solidFill>
+              <a:schemeClr val="tx1"/>
+            </a:solidFill>
+          </a:ln>
+        </p:spPr>
+        <p:style>
+          <a:lnRef idx="2">
+            <a:schemeClr val="accent1">
+              <a:shade val="15000"/>
+            </a:schemeClr>
+          </a:lnRef>
+          <a:fillRef idx="1">
+            <a:schemeClr val="accent1"/>
+          </a:fillRef>
+          <a:effectRef idx="0">
+            <a:schemeClr val="accent1"/>
+          </a:effectRef>
+          <a:fontRef idx="minor">
+            <a:schemeClr val="lt1"/>
+          </a:fontRef>
+        </p:style>
+        <p:txBody>
+          <a:bodyPr rtlCol="0" anchor="ctr"/>
+          <a:lstStyle/>
+          <a:p>
+            <a:pPr algn="ctr"/>
+            <a:endParaRPr lang="en-US"/>
+          </a:p>
+        </p:txBody>
+      </p:sp>
+      <p:sp>
+        <p:nvSpPr>
+          <p:cNvPr id="2" name="Action Button: Go Forward or Next 1">
+            <a:hlinkClick r:id="rId4" action="ppaction://hlinkfile" highlightClick="1"/>
+            <a:extLst>
+              <a:ext uri="{FF2B5EF4-FFF2-40B4-BE49-F238E27FC236}">
+                <a16:creationId xmlns:a16="http://schemas.microsoft.com/office/drawing/2014/main" id="{89AEE8D4-B87E-AFD3-D94F-D1E946903B63}"/>
+              </a:ext>
+            </a:extLst>
+          </p:cNvPr>
+          <p:cNvSpPr/>
+          <p:nvPr/>
+        </p:nvSpPr>
+        <p:spPr>
+          <a:xfrm>
+            <a:off x="1170879" y="2743199"/>
+            <a:ext cx="1750742" cy="1694985"/>
+          </a:xfrm>
+          <a:prstGeom prst="actionButtonForwardNext">
+            <a:avLst/>
+          </a:prstGeom>
+        </p:spPr>
+        <p:style>
+          <a:lnRef idx="2">
+            <a:schemeClr val="accent1">
+              <a:shade val="15000"/>
+            </a:schemeClr>
+          </a:lnRef>
+          <a:fillRef idx="1">
+            <a:schemeClr val="accent1"/>
+          </a:fillRef>
+          <a:effectRef idx="0">
+            <a:schemeClr val="accent1"/>
+          </a:effectRef>
+          <a:fontRef idx="minor">
+            <a:schemeClr val="lt1"/>
+          </a:fontRef>
+        </p:style>
+        <p:txBody>
+          <a:bodyPr rtlCol="0" anchor="ctr"/>
+          <a:lstStyle/>
+          <a:p>
+            <a:pPr algn="ctr"/>
+            <a:endParaRPr lang="en-US"/>
+          </a:p>
+        </p:txBody>
+      </p:sp>
+      <p:sp>
+        <p:nvSpPr>
+          <p:cNvPr id="22" name="Footer Placeholder 3">
+            <a:extLst>
+              <a:ext uri="{FF2B5EF4-FFF2-40B4-BE49-F238E27FC236}">
+                <a16:creationId xmlns:a16="http://schemas.microsoft.com/office/drawing/2014/main" id="{E3E683A0-F495-ABF4-817A-D9DDFD679A27}"/>
+              </a:ext>
+            </a:extLst>
+          </p:cNvPr>
+          <p:cNvSpPr txBox="1">
+            <a:spLocks/>
+          </p:cNvSpPr>
+          <p:nvPr/>
+        </p:nvSpPr>
+        <p:spPr>
+          <a:xfrm>
+            <a:off x="6096000" y="6209425"/>
+            <a:ext cx="6802160" cy="432384"/>
+          </a:xfrm>
+          <a:custGeom>
+            <a:avLst/>
+            <a:gdLst>
+              <a:gd name="connsiteX0" fmla="*/ 0 w 5213477"/>
+              <a:gd name="connsiteY0" fmla="*/ 0 h 6858000"/>
+              <a:gd name="connsiteX1" fmla="*/ 1268595 w 5213477"/>
+              <a:gd name="connsiteY1" fmla="*/ 0 h 6858000"/>
+              <a:gd name="connsiteX2" fmla="*/ 5213477 w 5213477"/>
+              <a:gd name="connsiteY2" fmla="*/ 1133731 h 6858000"/>
+              <a:gd name="connsiteX3" fmla="*/ 5213477 w 5213477"/>
+              <a:gd name="connsiteY3" fmla="*/ 5245005 h 6858000"/>
+              <a:gd name="connsiteX4" fmla="*/ 3534514 w 5213477"/>
+              <a:gd name="connsiteY4" fmla="*/ 6858000 h 6858000"/>
+              <a:gd name="connsiteX5" fmla="*/ 1676654 w 5213477"/>
+              <a:gd name="connsiteY5" fmla="*/ 6858000 h 6858000"/>
+            </a:gdLst>
+            <a:ahLst/>
+            <a:cxnLst>
+              <a:cxn ang="0">
+                <a:pos x="connsiteX0" y="connsiteY0"/>
+              </a:cxn>
+              <a:cxn ang="0">
+                <a:pos x="connsiteX1" y="connsiteY1"/>
+              </a:cxn>
+              <a:cxn ang="0">
+                <a:pos x="connsiteX2" y="connsiteY2"/>
+              </a:cxn>
+              <a:cxn ang="0">
+                <a:pos x="connsiteX3" y="connsiteY3"/>
+              </a:cxn>
+              <a:cxn ang="0">
+                <a:pos x="connsiteX4" y="connsiteY4"/>
+              </a:cxn>
+              <a:cxn ang="0">
+                <a:pos x="connsiteX5" y="connsiteY5"/>
+              </a:cxn>
+            </a:cxnLst>
+            <a:rect l="l" t="t" r="r" b="b"/>
+            <a:pathLst>
+              <a:path w="5213477" h="6858000">
+                <a:moveTo>
+                  <a:pt x="0" y="0"/>
+                </a:moveTo>
+                <a:lnTo>
+                  <a:pt x="1268595" y="0"/>
+                </a:lnTo>
+                <a:lnTo>
+                  <a:pt x="5213477" y="1133731"/>
+                </a:lnTo>
+                <a:lnTo>
+                  <a:pt x="5213477" y="5245005"/>
+                </a:lnTo>
+                <a:lnTo>
+                  <a:pt x="3534514" y="6858000"/>
+                </a:lnTo>
+                <a:lnTo>
+                  <a:pt x="1676654" y="6858000"/>
+                </a:lnTo>
+                <a:close/>
+              </a:path>
+            </a:pathLst>
+          </a:custGeom>
+        </p:spPr>
+        <p:txBody>
+          <a:bodyPr vert="horz" wrap="square" lIns="91440" tIns="45720" rIns="91440" bIns="45720" rtlCol="0" anchor="ctr">
+            <a:noAutofit/>
+          </a:bodyPr>
+          <a:lstStyle>
+            <a:lvl1pPr marL="0" indent="0" algn="ctr" defTabSz="914400" rtl="0" eaLnBrk="1" latinLnBrk="0" hangingPunct="1">
+              <a:lnSpc>
+                <a:spcPct val="90000"/>
+              </a:lnSpc>
+              <a:spcBef>
+                <a:spcPts val="1000"/>
+              </a:spcBef>
+              <a:buFont typeface="Arial" panose="020B0604020202020204" pitchFamily="34" charset="0"/>
+              <a:buNone/>
+              <a:defRPr sz="1800" b="0" i="0" kern="1200">
                 <a:solidFill>
-                  <a:srgbClr val="FFFFFF"/>
+                  <a:schemeClr val="bg1"/>
                 </a:solidFill>
-              </a14:hiddenFill>
-            </a:ext>
-          </a:extLst>
-        </p:spPr>
-      </p:pic>
+                <a:latin typeface="+mn-lt"/>
+                <a:ea typeface="+mn-ea"/>
+                <a:cs typeface="+mn-cs"/>
+              </a:defRPr>
+            </a:lvl1pPr>
+            <a:lvl2pPr marL="685800" indent="-228600" algn="l" defTabSz="914400" rtl="0" eaLnBrk="1" latinLnBrk="0" hangingPunct="1">
+              <a:lnSpc>
+                <a:spcPct val="90000"/>
+              </a:lnSpc>
+              <a:spcBef>
+                <a:spcPts val="500"/>
+              </a:spcBef>
+              <a:buFont typeface="Arial" panose="020B0604020202020204" pitchFamily="34" charset="0"/>
+              <a:buChar char="•"/>
+              <a:defRPr sz="2400" b="0" i="0" kern="1200">
+                <a:solidFill>
+                  <a:schemeClr val="bg1"/>
+                </a:solidFill>
+                <a:latin typeface="+mn-lt"/>
+                <a:ea typeface="+mn-ea"/>
+                <a:cs typeface="+mn-cs"/>
+              </a:defRPr>
+            </a:lvl2pPr>
+            <a:lvl3pPr marL="1143000" indent="-228600" algn="l" defTabSz="914400" rtl="0" eaLnBrk="1" latinLnBrk="0" hangingPunct="1">
+              <a:lnSpc>
+                <a:spcPct val="90000"/>
+              </a:lnSpc>
+              <a:spcBef>
+                <a:spcPts val="500"/>
+              </a:spcBef>
+              <a:buFont typeface="Arial" panose="020B0604020202020204" pitchFamily="34" charset="0"/>
+              <a:buChar char="•"/>
+              <a:defRPr sz="2000" b="0" i="0" kern="1200">
+                <a:solidFill>
+                  <a:schemeClr val="bg1"/>
+                </a:solidFill>
+                <a:latin typeface="+mn-lt"/>
+                <a:ea typeface="+mn-ea"/>
+                <a:cs typeface="+mn-cs"/>
+              </a:defRPr>
+            </a:lvl3pPr>
+            <a:lvl4pPr marL="1600200" indent="-228600" algn="l" defTabSz="914400" rtl="0" eaLnBrk="1" latinLnBrk="0" hangingPunct="1">
+              <a:lnSpc>
+                <a:spcPct val="90000"/>
+              </a:lnSpc>
+              <a:spcBef>
+                <a:spcPts val="500"/>
+              </a:spcBef>
+              <a:buFont typeface="Arial" panose="020B0604020202020204" pitchFamily="34" charset="0"/>
+              <a:buChar char="•"/>
+              <a:defRPr sz="1800" b="0" i="0" kern="1200">
+                <a:solidFill>
+                  <a:schemeClr val="bg1"/>
+                </a:solidFill>
+                <a:latin typeface="+mn-lt"/>
+                <a:ea typeface="+mn-ea"/>
+                <a:cs typeface="+mn-cs"/>
+              </a:defRPr>
+            </a:lvl4pPr>
+            <a:lvl5pPr marL="2057400" indent="-228600" algn="l" defTabSz="914400" rtl="0" eaLnBrk="1" latinLnBrk="0" hangingPunct="1">
+              <a:lnSpc>
+                <a:spcPct val="90000"/>
+              </a:lnSpc>
+              <a:spcBef>
+                <a:spcPts val="500"/>
+              </a:spcBef>
+              <a:buFont typeface="Arial" panose="020B0604020202020204" pitchFamily="34" charset="0"/>
+              <a:buChar char="•"/>
+              <a:defRPr sz="1800" b="0" i="0" kern="1200">
+                <a:solidFill>
+                  <a:schemeClr val="bg1"/>
+                </a:solidFill>
+                <a:latin typeface="+mn-lt"/>
+                <a:ea typeface="+mn-ea"/>
+                <a:cs typeface="+mn-cs"/>
+              </a:defRPr>
+            </a:lvl5pPr>
+            <a:lvl6pPr marL="2514600" indent="-228600" algn="l" defTabSz="914400" rtl="0" eaLnBrk="1" latinLnBrk="0" hangingPunct="1">
+              <a:lnSpc>
+                <a:spcPct val="90000"/>
+              </a:lnSpc>
+              <a:spcBef>
+                <a:spcPts val="500"/>
+              </a:spcBef>
+              <a:buFont typeface="Arial" panose="020B0604020202020204" pitchFamily="34" charset="0"/>
+              <a:buChar char="•"/>
+              <a:defRPr sz="1800" kern="1200">
+                <a:solidFill>
+                  <a:schemeClr val="tx1"/>
+                </a:solidFill>
+                <a:latin typeface="+mn-lt"/>
+                <a:ea typeface="+mn-ea"/>
+                <a:cs typeface="+mn-cs"/>
+              </a:defRPr>
+            </a:lvl6pPr>
+            <a:lvl7pPr marL="2971800" indent="-228600" algn="l" defTabSz="914400" rtl="0" eaLnBrk="1" latinLnBrk="0" hangingPunct="1">
+              <a:lnSpc>
+                <a:spcPct val="90000"/>
+              </a:lnSpc>
+              <a:spcBef>
+                <a:spcPts val="500"/>
+              </a:spcBef>
+              <a:buFont typeface="Arial" panose="020B0604020202020204" pitchFamily="34" charset="0"/>
+              <a:buChar char="•"/>
+              <a:defRPr sz="1800" kern="1200">
+                <a:solidFill>
+                  <a:schemeClr val="tx1"/>
+                </a:solidFill>
+                <a:latin typeface="+mn-lt"/>
+                <a:ea typeface="+mn-ea"/>
+                <a:cs typeface="+mn-cs"/>
+              </a:defRPr>
+            </a:lvl7pPr>
+            <a:lvl8pPr marL="3429000" indent="-228600" algn="l" defTabSz="914400" rtl="0" eaLnBrk="1" latinLnBrk="0" hangingPunct="1">
+              <a:lnSpc>
+                <a:spcPct val="90000"/>
+              </a:lnSpc>
+              <a:spcBef>
+                <a:spcPts val="500"/>
+              </a:spcBef>
+              <a:buFont typeface="Arial" panose="020B0604020202020204" pitchFamily="34" charset="0"/>
+              <a:buChar char="•"/>
+              <a:defRPr sz="1800" kern="1200">
+                <a:solidFill>
+                  <a:schemeClr val="tx1"/>
+                </a:solidFill>
+                <a:latin typeface="+mn-lt"/>
+                <a:ea typeface="+mn-ea"/>
+                <a:cs typeface="+mn-cs"/>
+              </a:defRPr>
+            </a:lvl8pPr>
+            <a:lvl9pPr marL="3886200" indent="-228600" algn="l" defTabSz="914400" rtl="0" eaLnBrk="1" latinLnBrk="0" hangingPunct="1">
+              <a:lnSpc>
+                <a:spcPct val="90000"/>
+              </a:lnSpc>
+              <a:spcBef>
+                <a:spcPts val="500"/>
+              </a:spcBef>
+              <a:buFont typeface="Arial" panose="020B0604020202020204" pitchFamily="34" charset="0"/>
+              <a:buChar char="•"/>
+              <a:defRPr sz="1800" kern="1200">
+                <a:solidFill>
+                  <a:schemeClr val="tx1"/>
+                </a:solidFill>
+                <a:latin typeface="+mn-lt"/>
+                <a:ea typeface="+mn-ea"/>
+                <a:cs typeface="+mn-cs"/>
+              </a:defRPr>
+            </a:lvl9pPr>
+          </a:lstStyle>
+          <a:p>
+            <a:r>
+              <a:rPr lang="en-US" sz="3200" b="1" dirty="0"/>
+              <a:t>JUDITH SOUTHARD, PT, DPT</a:t>
+            </a:r>
+          </a:p>
+        </p:txBody>
+      </p:sp>
     </p:spTree>
     <p:extLst>
       <p:ext uri="{BB962C8B-B14F-4D97-AF65-F5344CB8AC3E}">
-        <p14:creationId xmlns:p14="http://schemas.microsoft.com/office/powerpoint/2010/main" val="1789441374"/>
+        <p14:creationId xmlns:p14="http://schemas.microsoft.com/office/powerpoint/2010/main" val="1270566776"/>
       </p:ext>
     </p:extLst>
   </p:cSld>
   <p:clrMapOvr>
     <a:masterClrMapping/>
   </p:clrMapOvr>
-  <mc:AlternateContent xmlns:mc="http://schemas.openxmlformats.org/markup-compatibility/2006" xmlns:p159="http://schemas.microsoft.com/office/powerpoint/2015/09/main">
-    <mc:Choice Requires="p159">
-      <p:transition xmlns:p14="http://schemas.microsoft.com/office/powerpoint/2010/main" spd="slow" p14:dur="2000">
-        <p159:morph option="byObject"/>
+  <mc:AlternateContent xmlns:mc="http://schemas.openxmlformats.org/markup-compatibility/2006" xmlns:p14="http://schemas.microsoft.com/office/powerpoint/2010/main">
+    <mc:Choice Requires="p14">
+      <p:transition spd="med" p14:dur="700">
+        <p:fade/>
       </p:transition>
     </mc:Choice>
     <mc:Fallback xmlns="">
-      <p:transition spd="slow">
+      <p:transition spd="med">
         <p:fade/>
       </p:transition>
     </mc:Fallback>
@@ -17612,15 +17658,6 @@
 </file>
 
 <file path=customXml/item1.xml><?xml version="1.0" encoding="utf-8"?>
-<?mso-contentType ?>
-<FormTemplates xmlns="http://schemas.microsoft.com/sharepoint/v3/contenttype/forms">
-  <Display>DocumentLibraryForm</Display>
-  <Edit>DocumentLibraryForm</Edit>
-  <New>DocumentLibraryForm</New>
-</FormTemplates>
-</file>
-
-<file path=customXml/item2.xml><?xml version="1.0" encoding="utf-8"?>
 <p:properties xmlns:p="http://schemas.microsoft.com/office/2006/metadata/properties" xmlns:xsi="http://www.w3.org/2001/XMLSchema-instance" xmlns:pc="http://schemas.microsoft.com/office/infopath/2007/PartnerControls">
   <documentManagement>
     <_ip_UnifiedCompliancePolicyUIAction xmlns="http://schemas.microsoft.com/sharepoint/v3" xsi:nil="true"/>
@@ -17638,6 +17675,15 @@
     <MediaServiceKeyPoints xmlns="71af3243-3dd4-4a8d-8c0d-dd76da1f02a5" xsi:nil="true"/>
   </documentManagement>
 </p:properties>
+</file>
+
+<file path=customXml/item2.xml><?xml version="1.0" encoding="utf-8"?>
+<?mso-contentType ?>
+<FormTemplates xmlns="http://schemas.microsoft.com/sharepoint/v3/contenttype/forms">
+  <Display>DocumentLibraryForm</Display>
+  <Edit>DocumentLibraryForm</Edit>
+  <New>DocumentLibraryForm</New>
+</FormTemplates>
 </file>
 
 <file path=customXml/item3.xml><?xml version="1.0" encoding="utf-8"?>
@@ -17935,14 +17981,6 @@
 </file>
 
 <file path=customXml/itemProps1.xml><?xml version="1.0" encoding="utf-8"?>
-<ds:datastoreItem xmlns:ds="http://schemas.openxmlformats.org/officeDocument/2006/customXml" ds:itemID="{A04CDE3F-B8C2-4BD4-A62C-403E2F61E64B}">
-  <ds:schemaRefs>
-    <ds:schemaRef ds:uri="http://schemas.microsoft.com/sharepoint/v3/contenttype/forms"/>
-  </ds:schemaRefs>
-</ds:datastoreItem>
-</file>
-
-<file path=customXml/itemProps2.xml><?xml version="1.0" encoding="utf-8"?>
 <ds:datastoreItem xmlns:ds="http://schemas.openxmlformats.org/officeDocument/2006/customXml" ds:itemID="{F9075954-2B3E-4F12-B048-376C0BA053E0}">
   <ds:schemaRefs>
     <ds:schemaRef ds:uri="http://schemas.microsoft.com/office/2006/metadata/properties"/>
@@ -17950,6 +17988,14 @@
     <ds:schemaRef ds:uri="http://schemas.microsoft.com/sharepoint/v3"/>
     <ds:schemaRef ds:uri="71af3243-3dd4-4a8d-8c0d-dd76da1f02a5"/>
     <ds:schemaRef ds:uri="230e9df3-be65-4c73-a93b-d1236ebd677e"/>
+  </ds:schemaRefs>
+</ds:datastoreItem>
+</file>
+
+<file path=customXml/itemProps2.xml><?xml version="1.0" encoding="utf-8"?>
+<ds:datastoreItem xmlns:ds="http://schemas.openxmlformats.org/officeDocument/2006/customXml" ds:itemID="{A04CDE3F-B8C2-4BD4-A62C-403E2F61E64B}">
+  <ds:schemaRefs>
+    <ds:schemaRef ds:uri="http://schemas.microsoft.com/sharepoint/v3/contenttype/forms"/>
   </ds:schemaRefs>
 </ds:datastoreItem>
 </file>

--- a/PostOp Pal FINAL presentation.pptx
+++ b/PostOp Pal FINAL presentation.pptx
@@ -15801,8 +15801,8 @@
         </p:nvSpPr>
         <p:spPr>
           <a:xfrm>
-            <a:off x="375293" y="256139"/>
-            <a:ext cx="3262432" cy="923330"/>
+            <a:off x="648536" y="2118392"/>
+            <a:ext cx="2569934" cy="1754326"/>
           </a:xfrm>
           <a:prstGeom prst="rect">
             <a:avLst/>
@@ -15816,22 +15816,6 @@
           <a:lstStyle/>
           <a:p>
             <a:pPr algn="ctr"/>
-            <a:r>
-              <a:rPr lang="en-US" sz="5400" b="1" cap="none" spc="0" dirty="0" err="1">
-                <a:ln w="0"/>
-                <a:solidFill>
-                  <a:schemeClr val="accent1"/>
-                </a:solidFill>
-                <a:effectLst>
-                  <a:outerShdw blurRad="38100" dist="25400" dir="5400000" algn="ctr" rotWithShape="0">
-                    <a:srgbClr val="6E747A">
-                      <a:alpha val="43000"/>
-                    </a:srgbClr>
-                  </a:outerShdw>
-                </a:effectLst>
-              </a:rPr>
-              <a:t>PostOp</a:t>
-            </a:r>
             <a:r>
               <a:rPr lang="en-US" sz="5400" b="1" cap="none" spc="0" dirty="0">
                 <a:ln w="0"/>
@@ -15846,234 +15830,39 @@
                   </a:outerShdw>
                 </a:effectLst>
               </a:rPr>
-              <a:t> Pal</a:t>
-            </a:r>
-          </a:p>
-        </p:txBody>
-      </p:sp>
-      <p:sp>
-        <p:nvSpPr>
-          <p:cNvPr id="17" name="Content Placeholder 25">
-            <a:extLst>
-              <a:ext uri="{FF2B5EF4-FFF2-40B4-BE49-F238E27FC236}">
-                <a16:creationId xmlns:a16="http://schemas.microsoft.com/office/drawing/2014/main" id="{498B657C-3D4F-5BA1-B117-3DD4ECF4E841}"/>
-              </a:ext>
-            </a:extLst>
-          </p:cNvPr>
-          <p:cNvSpPr txBox="1">
-            <a:spLocks/>
-          </p:cNvSpPr>
-          <p:nvPr/>
-        </p:nvSpPr>
-        <p:spPr>
-          <a:xfrm>
-            <a:off x="648536" y="1339596"/>
-            <a:ext cx="6450603" cy="4800600"/>
-          </a:xfrm>
-          <a:prstGeom prst="rect">
-            <a:avLst/>
-          </a:prstGeom>
-        </p:spPr>
-        <p:txBody>
-          <a:bodyPr/>
-          <a:lstStyle>
-            <a:lvl1pPr marL="228600" indent="-228600" algn="l" defTabSz="914400" rtl="0" eaLnBrk="1" latinLnBrk="0" hangingPunct="1">
-              <a:lnSpc>
-                <a:spcPct val="90000"/>
-              </a:lnSpc>
-              <a:spcBef>
-                <a:spcPts val="1000"/>
-              </a:spcBef>
-              <a:buFont typeface="Arial" panose="020B0604020202020204" pitchFamily="34" charset="0"/>
-              <a:buChar char="•"/>
-              <a:defRPr sz="2800" b="0" i="0" kern="1200">
+              <a:t>Flow</a:t>
+            </a:r>
+          </a:p>
+          <a:p>
+            <a:pPr algn="ctr"/>
+            <a:r>
+              <a:rPr lang="en-US" sz="5400" b="1" dirty="0">
+                <a:ln w="0"/>
                 <a:solidFill>
-                  <a:schemeClr val="bg1"/>
+                  <a:schemeClr val="accent1"/>
                 </a:solidFill>
-                <a:latin typeface="+mn-lt"/>
-                <a:ea typeface="+mn-ea"/>
-                <a:cs typeface="+mn-cs"/>
-              </a:defRPr>
-            </a:lvl1pPr>
-            <a:lvl2pPr marL="685800" indent="-228600" algn="l" defTabSz="914400" rtl="0" eaLnBrk="1" latinLnBrk="0" hangingPunct="1">
-              <a:lnSpc>
-                <a:spcPct val="90000"/>
-              </a:lnSpc>
-              <a:spcBef>
-                <a:spcPts val="500"/>
-              </a:spcBef>
-              <a:buFont typeface="Arial" panose="020B0604020202020204" pitchFamily="34" charset="0"/>
-              <a:buChar char="•"/>
-              <a:defRPr sz="2400" b="0" i="0" kern="1200">
-                <a:solidFill>
-                  <a:schemeClr val="bg1"/>
-                </a:solidFill>
-                <a:latin typeface="+mn-lt"/>
-                <a:ea typeface="+mn-ea"/>
-                <a:cs typeface="+mn-cs"/>
-              </a:defRPr>
-            </a:lvl2pPr>
-            <a:lvl3pPr marL="1143000" indent="-228600" algn="l" defTabSz="914400" rtl="0" eaLnBrk="1" latinLnBrk="0" hangingPunct="1">
-              <a:lnSpc>
-                <a:spcPct val="90000"/>
-              </a:lnSpc>
-              <a:spcBef>
-                <a:spcPts val="500"/>
-              </a:spcBef>
-              <a:buFont typeface="Arial" panose="020B0604020202020204" pitchFamily="34" charset="0"/>
-              <a:buChar char="•"/>
-              <a:defRPr sz="2000" b="0" i="0" kern="1200">
-                <a:solidFill>
-                  <a:schemeClr val="bg1"/>
-                </a:solidFill>
-                <a:latin typeface="+mn-lt"/>
-                <a:ea typeface="+mn-ea"/>
-                <a:cs typeface="+mn-cs"/>
-              </a:defRPr>
-            </a:lvl3pPr>
-            <a:lvl4pPr marL="1600200" indent="-228600" algn="l" defTabSz="914400" rtl="0" eaLnBrk="1" latinLnBrk="0" hangingPunct="1">
-              <a:lnSpc>
-                <a:spcPct val="90000"/>
-              </a:lnSpc>
-              <a:spcBef>
-                <a:spcPts val="500"/>
-              </a:spcBef>
-              <a:buFont typeface="Arial" panose="020B0604020202020204" pitchFamily="34" charset="0"/>
-              <a:buChar char="•"/>
-              <a:defRPr sz="1800" b="0" i="0" kern="1200">
-                <a:solidFill>
-                  <a:schemeClr val="bg1"/>
-                </a:solidFill>
-                <a:latin typeface="+mn-lt"/>
-                <a:ea typeface="+mn-ea"/>
-                <a:cs typeface="+mn-cs"/>
-              </a:defRPr>
-            </a:lvl4pPr>
-            <a:lvl5pPr marL="2057400" indent="-228600" algn="l" defTabSz="914400" rtl="0" eaLnBrk="1" latinLnBrk="0" hangingPunct="1">
-              <a:lnSpc>
-                <a:spcPct val="90000"/>
-              </a:lnSpc>
-              <a:spcBef>
-                <a:spcPts val="500"/>
-              </a:spcBef>
-              <a:buFont typeface="Arial" panose="020B0604020202020204" pitchFamily="34" charset="0"/>
-              <a:buChar char="•"/>
-              <a:defRPr sz="1800" b="0" i="0" kern="1200">
-                <a:solidFill>
-                  <a:schemeClr val="bg1"/>
-                </a:solidFill>
-                <a:latin typeface="+mn-lt"/>
-                <a:ea typeface="+mn-ea"/>
-                <a:cs typeface="+mn-cs"/>
-              </a:defRPr>
-            </a:lvl5pPr>
-            <a:lvl6pPr marL="2514600" indent="-228600" algn="l" defTabSz="914400" rtl="0" eaLnBrk="1" latinLnBrk="0" hangingPunct="1">
-              <a:lnSpc>
-                <a:spcPct val="90000"/>
-              </a:lnSpc>
-              <a:spcBef>
-                <a:spcPts val="500"/>
-              </a:spcBef>
-              <a:buFont typeface="Arial" panose="020B0604020202020204" pitchFamily="34" charset="0"/>
-              <a:buChar char="•"/>
-              <a:defRPr sz="1800" kern="1200">
-                <a:solidFill>
-                  <a:schemeClr val="tx1"/>
-                </a:solidFill>
-                <a:latin typeface="+mn-lt"/>
-                <a:ea typeface="+mn-ea"/>
-                <a:cs typeface="+mn-cs"/>
-              </a:defRPr>
-            </a:lvl6pPr>
-            <a:lvl7pPr marL="2971800" indent="-228600" algn="l" defTabSz="914400" rtl="0" eaLnBrk="1" latinLnBrk="0" hangingPunct="1">
-              <a:lnSpc>
-                <a:spcPct val="90000"/>
-              </a:lnSpc>
-              <a:spcBef>
-                <a:spcPts val="500"/>
-              </a:spcBef>
-              <a:buFont typeface="Arial" panose="020B0604020202020204" pitchFamily="34" charset="0"/>
-              <a:buChar char="•"/>
-              <a:defRPr sz="1800" kern="1200">
-                <a:solidFill>
-                  <a:schemeClr val="tx1"/>
-                </a:solidFill>
-                <a:latin typeface="+mn-lt"/>
-                <a:ea typeface="+mn-ea"/>
-                <a:cs typeface="+mn-cs"/>
-              </a:defRPr>
-            </a:lvl7pPr>
-            <a:lvl8pPr marL="3429000" indent="-228600" algn="l" defTabSz="914400" rtl="0" eaLnBrk="1" latinLnBrk="0" hangingPunct="1">
-              <a:lnSpc>
-                <a:spcPct val="90000"/>
-              </a:lnSpc>
-              <a:spcBef>
-                <a:spcPts val="500"/>
-              </a:spcBef>
-              <a:buFont typeface="Arial" panose="020B0604020202020204" pitchFamily="34" charset="0"/>
-              <a:buChar char="•"/>
-              <a:defRPr sz="1800" kern="1200">
-                <a:solidFill>
-                  <a:schemeClr val="tx1"/>
-                </a:solidFill>
-                <a:latin typeface="+mn-lt"/>
-                <a:ea typeface="+mn-ea"/>
-                <a:cs typeface="+mn-cs"/>
-              </a:defRPr>
-            </a:lvl8pPr>
-            <a:lvl9pPr marL="3886200" indent="-228600" algn="l" defTabSz="914400" rtl="0" eaLnBrk="1" latinLnBrk="0" hangingPunct="1">
-              <a:lnSpc>
-                <a:spcPct val="90000"/>
-              </a:lnSpc>
-              <a:spcBef>
-                <a:spcPts val="500"/>
-              </a:spcBef>
-              <a:buFont typeface="Arial" panose="020B0604020202020204" pitchFamily="34" charset="0"/>
-              <a:buChar char="•"/>
-              <a:defRPr sz="1800" kern="1200">
-                <a:solidFill>
-                  <a:schemeClr val="tx1"/>
-                </a:solidFill>
-                <a:latin typeface="+mn-lt"/>
-                <a:ea typeface="+mn-ea"/>
-                <a:cs typeface="+mn-cs"/>
-              </a:defRPr>
-            </a:lvl9pPr>
-          </a:lstStyle>
-          <a:p>
-            <a:pPr>
-              <a:lnSpc>
-                <a:spcPct val="100000"/>
-              </a:lnSpc>
-            </a:pPr>
-            <a:r>
-              <a:rPr lang="en-US" spc="100" dirty="0">
-                <a:latin typeface="Univers Condensed" panose="020B0506020202050204" pitchFamily="34" charset="0"/>
-                <a:cs typeface="Calibri"/>
+                <a:effectLst>
+                  <a:outerShdw blurRad="38100" dist="25400" dir="5400000" algn="ctr" rotWithShape="0">
+                    <a:srgbClr val="6E747A">
+                      <a:alpha val="43000"/>
+                    </a:srgbClr>
+                  </a:outerShdw>
+                </a:effectLst>
               </a:rPr>
-              <a:t>Flow Diagram</a:t>
-            </a:r>
-          </a:p>
-          <a:p>
-            <a:pPr>
-              <a:lnSpc>
-                <a:spcPct val="100000"/>
-              </a:lnSpc>
-            </a:pPr>
-            <a:endParaRPr lang="en-US" spc="100" dirty="0">
-              <a:latin typeface="Univers Condensed" panose="020B0506020202050204" pitchFamily="34" charset="0"/>
-              <a:cs typeface="Calibri"/>
-            </a:endParaRPr>
-          </a:p>
-          <a:p>
-            <a:pPr>
-              <a:lnSpc>
-                <a:spcPct val="100000"/>
-              </a:lnSpc>
-            </a:pPr>
-            <a:endParaRPr lang="en-US" sz="2400" spc="100" dirty="0">
-              <a:latin typeface="Univers Condensed" panose="020B0506020202050204" pitchFamily="34" charset="0"/>
-              <a:cs typeface="Calibri"/>
+              <a:t>Diagram</a:t>
+            </a:r>
+            <a:endParaRPr lang="en-US" sz="5400" b="1" cap="none" spc="0" dirty="0">
+              <a:ln w="0"/>
+              <a:solidFill>
+                <a:schemeClr val="accent1"/>
+              </a:solidFill>
+              <a:effectLst>
+                <a:outerShdw blurRad="38100" dist="25400" dir="5400000" algn="ctr" rotWithShape="0">
+                  <a:srgbClr val="6E747A">
+                    <a:alpha val="43000"/>
+                  </a:srgbClr>
+                </a:outerShdw>
+              </a:effectLst>
             </a:endParaRPr>
           </a:p>
         </p:txBody>
@@ -16287,8 +16076,8 @@
         </p:nvSpPr>
         <p:spPr>
           <a:xfrm>
-            <a:off x="610049" y="288357"/>
-            <a:ext cx="3262432" cy="923330"/>
+            <a:off x="398453" y="288357"/>
+            <a:ext cx="3685624" cy="1754326"/>
           </a:xfrm>
           <a:prstGeom prst="rect">
             <a:avLst/>
@@ -16334,6 +16123,38 @@
               </a:rPr>
               <a:t> Pal</a:t>
             </a:r>
+          </a:p>
+          <a:p>
+            <a:pPr algn="ctr"/>
+            <a:r>
+              <a:rPr lang="en-US" sz="5400" b="1" dirty="0">
+                <a:ln w="0"/>
+                <a:solidFill>
+                  <a:schemeClr val="accent1"/>
+                </a:solidFill>
+                <a:effectLst>
+                  <a:outerShdw blurRad="38100" dist="25400" dir="5400000" algn="ctr" rotWithShape="0">
+                    <a:srgbClr val="6E747A">
+                      <a:alpha val="43000"/>
+                    </a:srgbClr>
+                  </a:outerShdw>
+                </a:effectLst>
+              </a:rPr>
+              <a:t>Python Code</a:t>
+            </a:r>
+            <a:endParaRPr lang="en-US" sz="5400" b="1" cap="none" spc="0" dirty="0">
+              <a:ln w="0"/>
+              <a:solidFill>
+                <a:schemeClr val="accent1"/>
+              </a:solidFill>
+              <a:effectLst>
+                <a:outerShdw blurRad="38100" dist="25400" dir="5400000" algn="ctr" rotWithShape="0">
+                  <a:srgbClr val="6E747A">
+                    <a:alpha val="43000"/>
+                  </a:srgbClr>
+                </a:outerShdw>
+              </a:effectLst>
+            </a:endParaRPr>
           </a:p>
         </p:txBody>
       </p:sp>

--- a/PostOp Pal FINAL presentation.pptx
+++ b/PostOp Pal FINAL presentation.pptx
@@ -5,15 +5,14 @@
     <p:sldMasterId id="2147483648" r:id="rId4"/>
   </p:sldMasterIdLst>
   <p:notesMasterIdLst>
-    <p:notesMasterId r:id="rId11"/>
+    <p:notesMasterId r:id="rId10"/>
   </p:notesMasterIdLst>
   <p:sldIdLst>
     <p:sldId id="334" r:id="rId5"/>
     <p:sldId id="319" r:id="rId6"/>
     <p:sldId id="320" r:id="rId7"/>
-    <p:sldId id="323" r:id="rId8"/>
-    <p:sldId id="336" r:id="rId9"/>
-    <p:sldId id="335" r:id="rId10"/>
+    <p:sldId id="336" r:id="rId8"/>
+    <p:sldId id="335" r:id="rId9"/>
   </p:sldIdLst>
   <p:sldSz cx="12192000" cy="6858000"/>
   <p:notesSz cx="6858000" cy="9144000"/>
@@ -214,7 +213,7 @@
           <a:p>
             <a:fld id="{AF8710A2-1535-B147-B3BB-C1589046255C}" type="datetimeFigureOut">
               <a:rPr lang="en-US" smtClean="0"/>
-              <a:t>5/2/2026</a:t>
+              <a:t>5/4/2026</a:t>
             </a:fld>
             <a:endParaRPr lang="en-US" dirty="0"/>
           </a:p>
@@ -818,129 +817,6 @@
   <p:cSld>
     <p:spTree>
       <p:nvGrpSpPr>
-        <p:cNvPr id="1" name=""/>
-        <p:cNvGrpSpPr/>
-        <p:nvPr/>
-      </p:nvGrpSpPr>
-      <p:grpSpPr>
-        <a:xfrm>
-          <a:off x="0" y="0"/>
-          <a:ext cx="0" cy="0"/>
-          <a:chOff x="0" y="0"/>
-          <a:chExt cx="0" cy="0"/>
-        </a:xfrm>
-      </p:grpSpPr>
-      <p:sp>
-        <p:nvSpPr>
-          <p:cNvPr id="2" name="Slide Image Placeholder 1"/>
-          <p:cNvSpPr>
-            <a:spLocks noGrp="1" noRot="1" noChangeAspect="1"/>
-          </p:cNvSpPr>
-          <p:nvPr>
-            <p:ph type="sldImg"/>
-          </p:nvPr>
-        </p:nvSpPr>
-        <p:spPr/>
-      </p:sp>
-      <p:sp>
-        <p:nvSpPr>
-          <p:cNvPr id="3" name="Notes Placeholder 2"/>
-          <p:cNvSpPr>
-            <a:spLocks noGrp="1"/>
-          </p:cNvSpPr>
-          <p:nvPr>
-            <p:ph type="body" idx="1"/>
-          </p:nvPr>
-        </p:nvSpPr>
-        <p:spPr/>
-        <p:txBody>
-          <a:bodyPr/>
-          <a:lstStyle/>
-          <a:p>
-            <a:r>
-              <a:rPr lang="en-US" dirty="0"/>
-              <a:t>The patient starts with selected the date of surgery and type of surgery. </a:t>
-            </a:r>
-          </a:p>
-          <a:p>
-            <a:endParaRPr lang="en-US" dirty="0"/>
-          </a:p>
-          <a:p>
-            <a:r>
-              <a:rPr lang="en-US" dirty="0"/>
-              <a:t>This will determine the phase you enter.  There is a screening question and as along as you meet criteria, you can proceed with the exercises.  </a:t>
-            </a:r>
-          </a:p>
-          <a:p>
-            <a:endParaRPr lang="en-US" dirty="0"/>
-          </a:p>
-          <a:p>
-            <a:r>
-              <a:rPr lang="en-US" dirty="0"/>
-              <a:t>If you do not meet criteria, for example if pain levels are too high, the program will request for you to complete another action before you try again.  </a:t>
-            </a:r>
-          </a:p>
-          <a:p>
-            <a:endParaRPr lang="en-US" dirty="0"/>
-          </a:p>
-          <a:p>
-            <a:r>
-              <a:rPr lang="en-US" dirty="0"/>
-              <a:t>After 12 weeks, your precautions for total hip will be lifted. </a:t>
-            </a:r>
-          </a:p>
-          <a:p>
-            <a:endParaRPr lang="en-US" dirty="0"/>
-          </a:p>
-          <a:p>
-            <a:r>
-              <a:rPr lang="en-US" dirty="0"/>
-              <a:t>If you have returned to normal function, the program will end.  </a:t>
-            </a:r>
-          </a:p>
-        </p:txBody>
-      </p:sp>
-      <p:sp>
-        <p:nvSpPr>
-          <p:cNvPr id="4" name="Slide Number Placeholder 3"/>
-          <p:cNvSpPr>
-            <a:spLocks noGrp="1"/>
-          </p:cNvSpPr>
-          <p:nvPr>
-            <p:ph type="sldNum" sz="quarter" idx="5"/>
-          </p:nvPr>
-        </p:nvSpPr>
-        <p:spPr/>
-        <p:txBody>
-          <a:bodyPr/>
-          <a:lstStyle/>
-          <a:p>
-            <a:fld id="{6BD99F43-FFA2-D94E-9493-556FC2A4F32F}" type="slidenum">
-              <a:rPr lang="en-US" smtClean="0"/>
-              <a:t>4</a:t>
-            </a:fld>
-            <a:endParaRPr lang="en-US" dirty="0"/>
-          </a:p>
-        </p:txBody>
-      </p:sp>
-    </p:spTree>
-    <p:extLst>
-      <p:ext uri="{BB962C8B-B14F-4D97-AF65-F5344CB8AC3E}">
-        <p14:creationId xmlns:p14="http://schemas.microsoft.com/office/powerpoint/2010/main" val="146796380"/>
-      </p:ext>
-    </p:extLst>
-  </p:cSld>
-  <p:clrMapOvr>
-    <a:masterClrMapping/>
-  </p:clrMapOvr>
-</p:notes>
-</file>
-
-<file path=ppt/notesSlides/notesSlide5.xml><?xml version="1.0" encoding="utf-8"?>
-<p:notes xmlns:a="http://schemas.openxmlformats.org/drawingml/2006/main" xmlns:r="http://schemas.openxmlformats.org/officeDocument/2006/relationships" xmlns:p="http://schemas.openxmlformats.org/presentationml/2006/main">
-  <p:cSld>
-    <p:spTree>
-      <p:nvGrpSpPr>
         <p:cNvPr id="1" name="">
           <a:extLst>
             <a:ext uri="{FF2B5EF4-FFF2-40B4-BE49-F238E27FC236}">
@@ -1087,7 +963,7 @@
           <a:p>
             <a:fld id="{6BD99F43-FFA2-D94E-9493-556FC2A4F32F}" type="slidenum">
               <a:rPr lang="en-US" smtClean="0"/>
-              <a:t>5</a:t>
+              <a:t>4</a:t>
             </a:fld>
             <a:endParaRPr lang="en-US" dirty="0"/>
           </a:p>
@@ -1106,7 +982,7 @@
 </p:notes>
 </file>
 
-<file path=ppt/notesSlides/notesSlide6.xml><?xml version="1.0" encoding="utf-8"?>
+<file path=ppt/notesSlides/notesSlide5.xml><?xml version="1.0" encoding="utf-8"?>
 <p:notes xmlns:a="http://schemas.openxmlformats.org/drawingml/2006/main" xmlns:r="http://schemas.openxmlformats.org/officeDocument/2006/relationships" xmlns:p="http://schemas.openxmlformats.org/presentationml/2006/main">
   <p:cSld>
     <p:spTree>
@@ -1252,7 +1128,7 @@
           <a:p>
             <a:fld id="{6BD99F43-FFA2-D94E-9493-556FC2A4F32F}" type="slidenum">
               <a:rPr lang="en-US" smtClean="0"/>
-              <a:t>6</a:t>
+              <a:t>5</a:t>
             </a:fld>
             <a:endParaRPr lang="en-US" dirty="0"/>
           </a:p>
@@ -15717,258 +15593,6 @@
   <p:cSld>
     <p:spTree>
       <p:nvGrpSpPr>
-        <p:cNvPr id="1" name=""/>
-        <p:cNvGrpSpPr/>
-        <p:nvPr/>
-      </p:nvGrpSpPr>
-      <p:grpSpPr>
-        <a:xfrm>
-          <a:off x="0" y="0"/>
-          <a:ext cx="0" cy="0"/>
-          <a:chOff x="0" y="0"/>
-          <a:chExt cx="0" cy="0"/>
-        </a:xfrm>
-      </p:grpSpPr>
-      <p:sp>
-        <p:nvSpPr>
-          <p:cNvPr id="3" name="Footer Placeholder 2">
-            <a:extLst>
-              <a:ext uri="{FF2B5EF4-FFF2-40B4-BE49-F238E27FC236}">
-                <a16:creationId xmlns:a16="http://schemas.microsoft.com/office/drawing/2014/main" id="{09672F13-D5A1-99D6-6699-F78CB161045F}"/>
-              </a:ext>
-            </a:extLst>
-          </p:cNvPr>
-          <p:cNvSpPr>
-            <a:spLocks noGrp="1"/>
-          </p:cNvSpPr>
-          <p:nvPr>
-            <p:ph type="ftr" sz="quarter" idx="10"/>
-          </p:nvPr>
-        </p:nvSpPr>
-        <p:spPr/>
-        <p:txBody>
-          <a:bodyPr/>
-          <a:lstStyle/>
-          <a:p>
-            <a:r>
-              <a:rPr lang="en-US" dirty="0"/>
-              <a:t>Fitness Presentation</a:t>
-            </a:r>
-          </a:p>
-        </p:txBody>
-      </p:sp>
-      <p:sp>
-        <p:nvSpPr>
-          <p:cNvPr id="4" name="Slide Number Placeholder 3">
-            <a:extLst>
-              <a:ext uri="{FF2B5EF4-FFF2-40B4-BE49-F238E27FC236}">
-                <a16:creationId xmlns:a16="http://schemas.microsoft.com/office/drawing/2014/main" id="{A9C5863A-2239-B76D-E785-5A656F160FE0}"/>
-              </a:ext>
-            </a:extLst>
-          </p:cNvPr>
-          <p:cNvSpPr>
-            <a:spLocks noGrp="1"/>
-          </p:cNvSpPr>
-          <p:nvPr>
-            <p:ph type="sldNum" sz="quarter" idx="11"/>
-          </p:nvPr>
-        </p:nvSpPr>
-        <p:spPr/>
-        <p:txBody>
-          <a:bodyPr/>
-          <a:lstStyle/>
-          <a:p>
-            <a:fld id="{294A09A9-5501-47C1-A89A-A340965A2BE2}" type="slidenum">
-              <a:rPr lang="en-US" smtClean="0"/>
-              <a:pPr/>
-              <a:t>4</a:t>
-            </a:fld>
-            <a:endParaRPr lang="en-US" dirty="0"/>
-          </a:p>
-        </p:txBody>
-      </p:sp>
-      <p:sp>
-        <p:nvSpPr>
-          <p:cNvPr id="16" name="Rectangle 15">
-            <a:extLst>
-              <a:ext uri="{FF2B5EF4-FFF2-40B4-BE49-F238E27FC236}">
-                <a16:creationId xmlns:a16="http://schemas.microsoft.com/office/drawing/2014/main" id="{189E1E3B-D35C-1288-B970-A29047BF26D5}"/>
-              </a:ext>
-            </a:extLst>
-          </p:cNvPr>
-          <p:cNvSpPr/>
-          <p:nvPr/>
-        </p:nvSpPr>
-        <p:spPr>
-          <a:xfrm>
-            <a:off x="648536" y="2118392"/>
-            <a:ext cx="2569934" cy="1754326"/>
-          </a:xfrm>
-          <a:prstGeom prst="rect">
-            <a:avLst/>
-          </a:prstGeom>
-          <a:noFill/>
-        </p:spPr>
-        <p:txBody>
-          <a:bodyPr wrap="none" lIns="91440" tIns="45720" rIns="91440" bIns="45720">
-            <a:spAutoFit/>
-          </a:bodyPr>
-          <a:lstStyle/>
-          <a:p>
-            <a:pPr algn="ctr"/>
-            <a:r>
-              <a:rPr lang="en-US" sz="5400" b="1" cap="none" spc="0" dirty="0">
-                <a:ln w="0"/>
-                <a:solidFill>
-                  <a:schemeClr val="accent1"/>
-                </a:solidFill>
-                <a:effectLst>
-                  <a:outerShdw blurRad="38100" dist="25400" dir="5400000" algn="ctr" rotWithShape="0">
-                    <a:srgbClr val="6E747A">
-                      <a:alpha val="43000"/>
-                    </a:srgbClr>
-                  </a:outerShdw>
-                </a:effectLst>
-              </a:rPr>
-              <a:t>Flow</a:t>
-            </a:r>
-          </a:p>
-          <a:p>
-            <a:pPr algn="ctr"/>
-            <a:r>
-              <a:rPr lang="en-US" sz="5400" b="1" dirty="0">
-                <a:ln w="0"/>
-                <a:solidFill>
-                  <a:schemeClr val="accent1"/>
-                </a:solidFill>
-                <a:effectLst>
-                  <a:outerShdw blurRad="38100" dist="25400" dir="5400000" algn="ctr" rotWithShape="0">
-                    <a:srgbClr val="6E747A">
-                      <a:alpha val="43000"/>
-                    </a:srgbClr>
-                  </a:outerShdw>
-                </a:effectLst>
-              </a:rPr>
-              <a:t>Diagram</a:t>
-            </a:r>
-            <a:endParaRPr lang="en-US" sz="5400" b="1" cap="none" spc="0" dirty="0">
-              <a:ln w="0"/>
-              <a:solidFill>
-                <a:schemeClr val="accent1"/>
-              </a:solidFill>
-              <a:effectLst>
-                <a:outerShdw blurRad="38100" dist="25400" dir="5400000" algn="ctr" rotWithShape="0">
-                  <a:srgbClr val="6E747A">
-                    <a:alpha val="43000"/>
-                  </a:srgbClr>
-                </a:outerShdw>
-              </a:effectLst>
-            </a:endParaRPr>
-          </a:p>
-        </p:txBody>
-      </p:sp>
-      <p:sp>
-        <p:nvSpPr>
-          <p:cNvPr id="18" name="Content Placeholder 17">
-            <a:extLst>
-              <a:ext uri="{FF2B5EF4-FFF2-40B4-BE49-F238E27FC236}">
-                <a16:creationId xmlns:a16="http://schemas.microsoft.com/office/drawing/2014/main" id="{B1818E3E-B394-EF81-CD0A-AE5DF3DD3827}"/>
-              </a:ext>
-            </a:extLst>
-          </p:cNvPr>
-          <p:cNvSpPr>
-            <a:spLocks noGrp="1"/>
-          </p:cNvSpPr>
-          <p:nvPr>
-            <p:ph sz="quarter" idx="12"/>
-          </p:nvPr>
-        </p:nvSpPr>
-        <p:spPr/>
-        <p:txBody>
-          <a:bodyPr/>
-          <a:lstStyle/>
-          <a:p>
-            <a:endParaRPr lang="en-US"/>
-          </a:p>
-        </p:txBody>
-      </p:sp>
-      <p:pic>
-        <p:nvPicPr>
-          <p:cNvPr id="1032" name="Picture 8">
-            <a:extLst>
-              <a:ext uri="{FF2B5EF4-FFF2-40B4-BE49-F238E27FC236}">
-                <a16:creationId xmlns:a16="http://schemas.microsoft.com/office/drawing/2014/main" id="{2296E1E8-0AA9-5909-250B-197ABAD350A0}"/>
-              </a:ext>
-            </a:extLst>
-          </p:cNvPr>
-          <p:cNvPicPr>
-            <a:picLocks noChangeAspect="1" noChangeArrowheads="1"/>
-          </p:cNvPicPr>
-          <p:nvPr/>
-        </p:nvPicPr>
-        <p:blipFill>
-          <a:blip r:embed="rId3">
-            <a:extLst>
-              <a:ext uri="{28A0092B-C50C-407E-A947-70E740481C1C}">
-                <a14:useLocalDpi xmlns:a14="http://schemas.microsoft.com/office/drawing/2010/main" val="0"/>
-              </a:ext>
-            </a:extLst>
-          </a:blip>
-          <a:srcRect/>
-          <a:stretch>
-            <a:fillRect/>
-          </a:stretch>
-        </p:blipFill>
-        <p:spPr bwMode="auto">
-          <a:xfrm>
-            <a:off x="3688099" y="-253951"/>
-            <a:ext cx="8776665" cy="7312477"/>
-          </a:xfrm>
-          <a:prstGeom prst="rect">
-            <a:avLst/>
-          </a:prstGeom>
-          <a:noFill/>
-          <a:extLst>
-            <a:ext uri="{909E8E84-426E-40DD-AFC4-6F175D3DCCD1}">
-              <a14:hiddenFill xmlns:a14="http://schemas.microsoft.com/office/drawing/2010/main">
-                <a:solidFill>
-                  <a:srgbClr val="FFFFFF"/>
-                </a:solidFill>
-              </a14:hiddenFill>
-            </a:ext>
-          </a:extLst>
-        </p:spPr>
-      </p:pic>
-    </p:spTree>
-    <p:extLst>
-      <p:ext uri="{BB962C8B-B14F-4D97-AF65-F5344CB8AC3E}">
-        <p14:creationId xmlns:p14="http://schemas.microsoft.com/office/powerpoint/2010/main" val="1789441374"/>
-      </p:ext>
-    </p:extLst>
-  </p:cSld>
-  <p:clrMapOvr>
-    <a:masterClrMapping/>
-  </p:clrMapOvr>
-  <mc:AlternateContent xmlns:mc="http://schemas.openxmlformats.org/markup-compatibility/2006" xmlns:p159="http://schemas.microsoft.com/office/powerpoint/2015/09/main">
-    <mc:Choice Requires="p159">
-      <p:transition xmlns:p14="http://schemas.microsoft.com/office/powerpoint/2010/main" spd="slow" p14:dur="2000">
-        <p159:morph option="byObject"/>
-      </p:transition>
-    </mc:Choice>
-    <mc:Fallback xmlns="">
-      <p:transition spd="slow">
-        <p:fade/>
-      </p:transition>
-    </mc:Fallback>
-  </mc:AlternateContent>
-</p:sld>
-</file>
-
-<file path=ppt/slides/slide5.xml><?xml version="1.0" encoding="utf-8"?>
-<p:sld xmlns:a="http://schemas.openxmlformats.org/drawingml/2006/main" xmlns:r="http://schemas.openxmlformats.org/officeDocument/2006/relationships" xmlns:p="http://schemas.openxmlformats.org/presentationml/2006/main">
-  <p:cSld>
-    <p:spTree>
-      <p:nvGrpSpPr>
         <p:cNvPr id="1" name="">
           <a:extLst>
             <a:ext uri="{FF2B5EF4-FFF2-40B4-BE49-F238E27FC236}">
@@ -16417,7 +16041,7 @@
       <p:sp>
         <p:nvSpPr>
           <p:cNvPr id="2" name="Action Button: Go Forward or Next 1">
-            <a:hlinkClick r:id="rId4" action="ppaction://hlinkfile" highlightClick="1"/>
+            <a:hlinkClick r:id="rId4" action="ppaction://hlinkfile"/>
             <a:extLst>
               <a:ext uri="{FF2B5EF4-FFF2-40B4-BE49-F238E27FC236}">
                 <a16:creationId xmlns:a16="http://schemas.microsoft.com/office/drawing/2014/main" id="{89AEE8D4-B87E-AFD3-D94F-D1E946903B63}"/>
@@ -16719,6 +16343,44 @@
           </a:p>
         </p:txBody>
       </p:sp>
+      <p:sp>
+        <p:nvSpPr>
+          <p:cNvPr id="3" name="TextBox 2">
+            <a:extLst>
+              <a:ext uri="{FF2B5EF4-FFF2-40B4-BE49-F238E27FC236}">
+                <a16:creationId xmlns:a16="http://schemas.microsoft.com/office/drawing/2014/main" id="{17353102-8F60-9BE6-DD47-F43DF765DD3E}"/>
+              </a:ext>
+            </a:extLst>
+          </p:cNvPr>
+          <p:cNvSpPr txBox="1"/>
+          <p:nvPr/>
+        </p:nvSpPr>
+        <p:spPr>
+          <a:xfrm>
+            <a:off x="10841" y="5364515"/>
+            <a:ext cx="5735866" cy="307777"/>
+          </a:xfrm>
+          <a:prstGeom prst="rect">
+            <a:avLst/>
+          </a:prstGeom>
+          <a:noFill/>
+        </p:spPr>
+        <p:txBody>
+          <a:bodyPr wrap="none" rtlCol="0">
+            <a:spAutoFit/>
+          </a:bodyPr>
+          <a:lstStyle/>
+          <a:p>
+            <a:r>
+              <a:rPr lang="en-US" sz="1400" dirty="0">
+                <a:hlinkClick r:id="rId5"/>
+              </a:rPr>
+              <a:t>GitHub - jsouth32/Judith-Southard-2026-HMI: Repository for HMI7540 · GitHub</a:t>
+            </a:r>
+            <a:endParaRPr lang="en-US" sz="1400" dirty="0"/>
+          </a:p>
+        </p:txBody>
+      </p:sp>
     </p:spTree>
     <p:extLst>
       <p:ext uri="{BB962C8B-B14F-4D97-AF65-F5344CB8AC3E}">
@@ -16744,7 +16406,7 @@
 </p:sld>
 </file>
 
-<file path=ppt/slides/slide6.xml><?xml version="1.0" encoding="utf-8"?>
+<file path=ppt/slides/slide5.xml><?xml version="1.0" encoding="utf-8"?>
 <p:sld xmlns:a="http://schemas.openxmlformats.org/drawingml/2006/main" xmlns:r="http://schemas.openxmlformats.org/officeDocument/2006/relationships" xmlns:p="http://schemas.openxmlformats.org/presentationml/2006/main">
   <p:cSld>
     <p:spTree>
@@ -17479,6 +17141,15 @@
 </file>
 
 <file path=customXml/item1.xml><?xml version="1.0" encoding="utf-8"?>
+<?mso-contentType ?>
+<FormTemplates xmlns="http://schemas.microsoft.com/sharepoint/v3/contenttype/forms">
+  <Display>DocumentLibraryForm</Display>
+  <Edit>DocumentLibraryForm</Edit>
+  <New>DocumentLibraryForm</New>
+</FormTemplates>
+</file>
+
+<file path=customXml/item2.xml><?xml version="1.0" encoding="utf-8"?>
 <p:properties xmlns:p="http://schemas.microsoft.com/office/2006/metadata/properties" xmlns:xsi="http://www.w3.org/2001/XMLSchema-instance" xmlns:pc="http://schemas.microsoft.com/office/infopath/2007/PartnerControls">
   <documentManagement>
     <_ip_UnifiedCompliancePolicyUIAction xmlns="http://schemas.microsoft.com/sharepoint/v3" xsi:nil="true"/>
@@ -17496,15 +17167,6 @@
     <MediaServiceKeyPoints xmlns="71af3243-3dd4-4a8d-8c0d-dd76da1f02a5" xsi:nil="true"/>
   </documentManagement>
 </p:properties>
-</file>
-
-<file path=customXml/item2.xml><?xml version="1.0" encoding="utf-8"?>
-<?mso-contentType ?>
-<FormTemplates xmlns="http://schemas.microsoft.com/sharepoint/v3/contenttype/forms">
-  <Display>DocumentLibraryForm</Display>
-  <Edit>DocumentLibraryForm</Edit>
-  <New>DocumentLibraryForm</New>
-</FormTemplates>
 </file>
 
 <file path=customXml/item3.xml><?xml version="1.0" encoding="utf-8"?>
@@ -17802,6 +17464,14 @@
 </file>
 
 <file path=customXml/itemProps1.xml><?xml version="1.0" encoding="utf-8"?>
+<ds:datastoreItem xmlns:ds="http://schemas.openxmlformats.org/officeDocument/2006/customXml" ds:itemID="{A04CDE3F-B8C2-4BD4-A62C-403E2F61E64B}">
+  <ds:schemaRefs>
+    <ds:schemaRef ds:uri="http://schemas.microsoft.com/sharepoint/v3/contenttype/forms"/>
+  </ds:schemaRefs>
+</ds:datastoreItem>
+</file>
+
+<file path=customXml/itemProps2.xml><?xml version="1.0" encoding="utf-8"?>
 <ds:datastoreItem xmlns:ds="http://schemas.openxmlformats.org/officeDocument/2006/customXml" ds:itemID="{F9075954-2B3E-4F12-B048-376C0BA053E0}">
   <ds:schemaRefs>
     <ds:schemaRef ds:uri="http://schemas.microsoft.com/office/2006/metadata/properties"/>
@@ -17809,14 +17479,6 @@
     <ds:schemaRef ds:uri="http://schemas.microsoft.com/sharepoint/v3"/>
     <ds:schemaRef ds:uri="71af3243-3dd4-4a8d-8c0d-dd76da1f02a5"/>
     <ds:schemaRef ds:uri="230e9df3-be65-4c73-a93b-d1236ebd677e"/>
-  </ds:schemaRefs>
-</ds:datastoreItem>
-</file>
-
-<file path=customXml/itemProps2.xml><?xml version="1.0" encoding="utf-8"?>
-<ds:datastoreItem xmlns:ds="http://schemas.openxmlformats.org/officeDocument/2006/customXml" ds:itemID="{A04CDE3F-B8C2-4BD4-A62C-403E2F61E64B}">
-  <ds:schemaRefs>
-    <ds:schemaRef ds:uri="http://schemas.microsoft.com/sharepoint/v3/contenttype/forms"/>
   </ds:schemaRefs>
 </ds:datastoreItem>
 </file>
